--- a/docs/presentation/ReviewPulse_DemoDay.pptx
+++ b/docs/presentation/ReviewPulse_DemoDay.pptx
@@ -7909,7 +7909,7 @@
 </file>
 
 <file path=ppt/slides/slide13.xml><?xml version="1.0" encoding="UTF-8" standalone="yes"?>-<p:sld xmlns:a="http://schemas.openxmlformats.org/drawingml/2006/main" xmlns:r="http://schemas.openxmlformats.org/officeDocument/2006/relationships" xmlns:mc="http://schemas.openxmlformats.org/markup-compatibility/2006" xmlns:mv="urn:schemas-microsoft-com:mac:vml" xmlns:p="http://schemas.openxmlformats.org/presentationml/2006/main" xmlns:c="http://schemas.openxmlformats.org/drawingml/2006/chart" xmlns:dgm="http://schemas.openxmlformats.org/drawingml/2006/diagram" xmlns:o="urn:schemas-microsoft-com:office:office" xmlns:v="urn:schemas-microsoft-com:vml" xmlns:pvml="urn:schemas-microsoft-com:office:powerpoint" xmlns:com="http://schemas.openxmlformats.org/drawingml/2006/compatibility" xmlns:p14="http://schemas.microsoft.com/office/powerpoint/2010/main" xmlns:p15="http://schemas.microsoft.com/office/powerpoint/2012/main" xmlns:ahyp="http://schemas.microsoft.com/office/drawing/2018/hyperlinkcolor"><p:cSld><p:spTree><p:nvGrpSpPr><p:cNvPr id="178" name="Shape 178"/><p:cNvGrpSpPr/><p:nvPr/></p:nvGrpSpPr><p:grpSpPr><a:xfrm><a:off x="0" y="0"/><a:ext cx="0" cy="0"/><a:chOff x="0" y="0"/><a:chExt cx="0" cy="0"/></a:xfrm></p:grpSpPr><p:sp><p:nvSpPr><p:cNvPr id="179" name="Google Shape;179;p25"/><p:cNvSpPr txBox="1"/><p:nvPr><p:ph idx="4294967295" type="ctrTitle"/></p:nvPr></p:nvSpPr><p:spPr><a:xfrm><a:off x="1192664" y="403309"/><a:ext cx="5315100" cy="533100"/></a:xfrm><a:prstGeom prst="rect"><a:avLst/></a:prstGeom><a:noFill/><a:ln><a:noFill/></a:ln></p:spPr><p:txBody><a:bodyPr anchorCtr="0" anchor="t" bIns="91425" lIns="91425" spcFirstLastPara="1" rIns="91425" wrap="square" tIns="91425"><a:noAutofit/></a:bodyPr><a:lstStyle/><a:p><a:pPr indent="0" lvl="0" marL="0" marR="0" rtl="0" algn="l"><a:lnSpc><a:spcPct val="100000"/></a:lnSpc><a:spcBef><a:spcPts val="0"/></a:spcBef><a:spcAft><a:spcPts val="0"/></a:spcAft><a:buClr><a:schemeClr val="dk1"/></a:buClr><a:buSzPts val="2800"/><a:buFont typeface="Arial"/><a:buNone/></a:pPr><a:r><a:rPr lang="fr" sz="2500"><a:solidFill><a:srgbClr val="0E3449"/></a:solidFill><a:latin typeface="Inter SemiBold"/><a:ea typeface="Inter SemiBold"/><a:cs typeface="Inter SemiBold"/><a:sym typeface="Inter SemiBold"/></a:rPr><a:t>La chaîne de bout en bout</a:t></a:r><a:endParaRPr i="0" sz="2500" u="none" cap="none" strike="noStrike"><a:solidFill><a:srgbClr val="0E3449"/></a:solidFill><a:latin typeface="Inter SemiBold"/><a:ea typeface="Inter SemiBold"/><a:cs typeface="Inter SemiBold"/><a:sym typeface="Inter SemiBold"/></a:endParaRPr></a:p></p:txBody></p:sp><p:sp><p:nvSpPr><p:cNvPr id="180" name="Google Shape;180;p25"/><p:cNvSpPr/><p:nvPr/></p:nvSpPr><p:spPr><a:xfrm><a:off x="10225" y="4892025"/><a:ext cx="9144000" cy="251400"/></a:xfrm><a:prstGeom prst="rect"><a:avLst/></a:prstGeom><a:solidFill><a:srgbClr val="C3FFFC"/></a:solidFill><a:ln><a:noFill/></a:ln></p:spPr><p:txBody><a:bodyPr anchorCtr="0" anchor="ctr" bIns="91425" lIns="91425" spcFirstLastPara="1" rIns="91425" wrap="square" tIns="91425"><a:noAutofit/></a:bodyPr><a:lstStyle/><a:p><a:pPr indent="0" lvl="0" marL="0" marR="0" rtl="0" algn="l"><a:lnSpc><a:spcPct val="100000"/></a:lnSpc><a:spcBef><a:spcPts val="0"/></a:spcBef><a:spcAft><a:spcPts val="0"/></a:spcAft><a:buClr><a:srgbClr val="000000"/></a:buClr><a:buSzPts val="1400"/><a:buFont typeface="Arial"/><a:buNone/></a:pPr><a:r><a:t></a:t></a:r><a:endParaRPr b="0" i="0" sz="1400" u="none" cap="none" strike="noStrike"><a:solidFill><a:srgbClr val="000000"/></a:solidFill><a:latin typeface="Arial"/><a:ea typeface="Arial"/><a:cs typeface="Arial"/><a:sym typeface="Arial"/></a:endParaRPr></a:p></p:txBody></p:sp><p:pic><p:nvPicPr><p:cNvPr id="181" name="Google Shape;181;p25"/><p:cNvPicPr preferRelativeResize="0"/><p:nvPr/></p:nvPicPr><p:blipFill rotWithShape="1"><a:blip r:embed="rId3"><a:alphaModFix/></a:blip><a:srcRect b="0" l="0" r="0" t="0"/><a:stretch/></p:blipFill><p:spPr><a:xfrm><a:off x="463375" y="482852"/><a:ext cx="576900" cy="385904"/></a:xfrm><a:prstGeom prst="rect"><a:avLst/></a:prstGeom><a:noFill/><a:ln><a:noFill/></a:ln></p:spPr></p:pic><p:sp><p:nvSpPr><p:cNvPr id="182" name="Google Shape;182;p25"/><p:cNvSpPr txBox="1"/><p:nvPr/></p:nvSpPr><p:spPr><a:xfrm><a:off x="1261450" y="1017575"/><a:ext cx="1902900" cy="461700"/></a:xfrm><a:prstGeom prst="rect"><a:avLst/></a:prstGeom><a:noFill/><a:ln><a:noFill/></a:ln></p:spPr><p:txBody><a:bodyPr anchorCtr="0" anchor="t" bIns="91425" lIns="91425" spcFirstLastPara="1" rIns="91425" wrap="square" tIns="91425"><a:spAutoFit/></a:bodyPr><a:lstStyle/><a:p><a:pPr indent="0" lvl="0" marL="0" rtl="0" algn="l"><a:spcBef><a:spcPts val="0"/></a:spcBef><a:spcAft><a:spcPts val="0"/></a:spcAft><a:buNone/></a:pPr><a:r><a:rPr lang="fr" sz="1800"><a:solidFill><a:schemeClr val="dk2"/></a:solidFill></a:rPr><a:t>Six étapes, une seule chaîne</a:t></a:r><a:endParaRPr sz="1800"><a:solidFill><a:schemeClr val="dk2"/></a:solidFill></a:endParaRPr></a:p></p:txBody></p:sp><p:sp><p:nvSpPr><p:cNvPr id="183" name="Google Shape;183;p25"/><p:cNvSpPr/><p:nvPr/></p:nvSpPr><p:spPr><a:xfrm><a:off x="650300" y="1861675"/><a:ext cx="2382600" cy="1248600"/></a:xfrm><a:prstGeom prst="roundRect"><a:avLst><a:gd fmla="val 11687" name="adj"/></a:avLst></a:prstGeom><a:solidFill><a:srgbClr val="FFFFFF"/></a:solidFill><a:ln cap="flat" cmpd="sng" w="9525"><a:solidFill><a:srgbClr val="FF7047"/></a:solidFill><a:prstDash val="solid"/><a:round/><a:headEnd len="sm" w="sm" type="none"/><a:tailEnd len="sm" w="sm" type="none"/>Ingestion idempotente depuis l'API Steam</a:t></a:r><a:endParaRPr/></a:p></p:txBody></p:sp><p:sp><p:nvSpPr><p:cNvPr id="184" name="Google Shape;184;p25"/><p:cNvSpPr/><p:nvPr/></p:nvSpPr><p:spPr><a:xfrm><a:off x="3264775" y="1861675"/><a:ext cx="1856100" cy="1248600"/></a:xfrm><a:prstGeom prst="roundRect"><a:avLst><a:gd fmla="val 11687" name="adj"/></a:avLst></a:prstGeom><a:solidFill><a:srgbClr val="FFFFFF"/></a:solidFill><a:ln cap="flat" cmpd="sng" w="9525"><a:solidFill><a:srgbClr val="FF7047"/></a:solidFill><a:prstDash val="solid"/><a:round/><a:headEnd len="sm" w="sm" type="none"/><a:tailEnd len="sm" w="sm" type="none"/ xml:space="preserve">Zone silver : </a:t></a:r><a:r><a:rPr lang="fr" sz="1650"><a:solidFill><a:srgbClr val="55575A"/></a:solidFill><a:latin typeface="Manrope"/><a:ea typeface="Manrope"/><a:cs typeface="Manrope"/><a:sym typeface="Manrope"/></a:rPr><a:t>PySpark et Iceberg</a:t></a:r><a:endParaRPr/></a:p></p:txBody></p:sp><p:sp><p:nvSpPr><p:cNvPr id="185" name="Google Shape;185;p25"/><p:cNvSpPr/><p:nvPr/></p:nvSpPr><p:spPr><a:xfrm><a:off x="5352750" y="1861675"/><a:ext cx="2877300" cy="1248600"/></a:xfrm><a:prstGeom prst="roundRect"><a:avLst><a:gd fmla="val 11687" name="adj"/></a:avLst></a:prstGeom><a:solidFill><a:srgbClr val="FFFFFF"/></a:solidFill><a:ln cap="flat" cmpd="sng" w="9525"><a:solidFill><a:srgbClr val="FF7047"/></a:solidFill><a:prstDash val="solid"/><a:round/><a:headEnd len="sm" w="sm" type="none"/><a:tailEnd len="sm" w="sm" type="none"/ xml:space="preserve">Zone gold : </a:t></a:r><a:br><a:rPr b="1" lang="fr" sz="1650"><a:solidFill><a:srgbClr val="55575A"/></a:solidFill><a:latin typeface="Manrope"/><a:ea typeface="Manrope"/><a:cs typeface="Manrope"/><a:sym typeface="Manrope"/></a:rPr></a:br><a:r><a:rPr lang="fr" sz="1650"><a:solidFill><a:srgbClr val="55575A"/></a:solidFill><a:latin typeface="Manrope"/><a:ea typeface="Manrope"/><a:cs typeface="Manrope"/><a:sym typeface="Manrope"/></a:rPr><a:t>dbt et DuckDB, 43 tests verts</a:t></a:r><a:endParaRPr/></a:p></p:txBody></p:sp></p:spTree></p:cSld><p:clrMapOvr><a:masterClrMapping/></p:clrMapOvr></p:sld>
+<p:sld xmlns:a="http://schemas.openxmlformats.org/drawingml/2006/main" xmlns:r="http://schemas.openxmlformats.org/officeDocument/2006/relationships" xmlns:mc="http://schemas.openxmlformats.org/markup-compatibility/2006" xmlns:mv="urn:schemas-microsoft-com:mac:vml" xmlns:p="http://schemas.openxmlformats.org/presentationml/2006/main" xmlns:c="http://schemas.openxmlformats.org/drawingml/2006/chart" xmlns:dgm="http://schemas.openxmlformats.org/drawingml/2006/diagram" xmlns:o="urn:schemas-microsoft-com:office:office" xmlns:v="urn:schemas-microsoft-com:vml" xmlns:pvml="urn:schemas-microsoft-com:office:powerpoint" xmlns:com="http://schemas.openxmlformats.org/drawingml/2006/compatibility" xmlns:p14="http://schemas.microsoft.com/office/powerpoint/2010/main" xmlns:p15="http://schemas.microsoft.com/office/powerpoint/2012/main" xmlns:ahyp="http://schemas.microsoft.com/office/drawing/2018/hyperlinkcolor"><p:cSld><p:spTree><p:nvGrpSpPr><p:cNvPr id="178" name="Shape 178"/><p:cNvGrpSpPr/><p:nvPr/></p:nvGrpSpPr><p:grpSpPr><a:xfrm><a:off x="0" y="0"/><a:ext cx="0" cy="0"/><a:chOff x="0" y="0"/><a:chExt cx="0" cy="0"/></a:xfrm></p:grpSpPr><p:sp><p:nvSpPr><p:cNvPr id="179" name="Google Shape;179;p25"/><p:cNvSpPr txBox="1"/><p:nvPr><p:ph idx="4294967295" type="ctrTitle"/></p:nvPr></p:nvSpPr><p:spPr><a:xfrm><a:off x="1192664" y="403309"/><a:ext cx="5315100" cy="533100"/></a:xfrm><a:prstGeom prst="rect"><a:avLst/></a:prstGeom><a:noFill/><a:ln><a:noFill/></a:ln></p:spPr><p:txBody><a:bodyPr anchorCtr="0" anchor="t" bIns="91425" lIns="91425" spcFirstLastPara="1" rIns="91425" wrap="square" tIns="91425"><a:noAutofit/></a:bodyPr><a:lstStyle/><a:p><a:pPr indent="0" lvl="0" marL="0" marR="0" rtl="0" algn="l"><a:lnSpc><a:spcPct val="100000"/></a:lnSpc><a:spcBef><a:spcPts val="0"/></a:spcBef><a:spcAft><a:spcPts val="0"/></a:spcAft><a:buClr><a:schemeClr val="dk1"/></a:buClr><a:buSzPts val="2800"/><a:buFont typeface="Arial"/><a:buNone/></a:pPr><a:r><a:rPr lang="fr" sz="2500"><a:solidFill><a:srgbClr val="0E3449"/></a:solidFill><a:latin typeface="Inter SemiBold"/><a:ea typeface="Inter SemiBold"/><a:cs typeface="Inter SemiBold"/><a:sym typeface="Inter SemiBold"/></a:rPr><a:t>La chaîne de bout en bout</a:t></a:r><a:endParaRPr i="0" sz="2500" u="none" cap="none" strike="noStrike"><a:solidFill><a:srgbClr val="0E3449"/></a:solidFill><a:latin typeface="Inter SemiBold"/><a:ea typeface="Inter SemiBold"/><a:cs typeface="Inter SemiBold"/><a:sym typeface="Inter SemiBold"/></a:endParaRPr></a:p></p:txBody></p:sp><p:sp><p:nvSpPr><p:cNvPr id="180" name="Google Shape;180;p25"/><p:cNvSpPr/><p:nvPr/></p:nvSpPr><p:spPr><a:xfrm><a:off x="10225" y="4892025"/><a:ext cx="9144000" cy="251400"/></a:xfrm><a:prstGeom prst="rect"><a:avLst/></a:prstGeom><a:solidFill><a:srgbClr val="C3FFFC"/></a:solidFill><a:ln><a:noFill/></a:ln></p:spPr><p:txBody><a:bodyPr anchorCtr="0" anchor="ctr" bIns="91425" lIns="91425" spcFirstLastPara="1" rIns="91425" wrap="square" tIns="91425"><a:noAutofit/></a:bodyPr><a:lstStyle/><a:p><a:pPr indent="0" lvl="0" marL="0" marR="0" rtl="0" algn="l"><a:lnSpc><a:spcPct val="100000"/></a:lnSpc><a:spcBef><a:spcPts val="0"/></a:spcBef><a:spcAft><a:spcPts val="0"/></a:spcAft><a:buClr><a:srgbClr val="000000"/></a:buClr><a:buSzPts val="1400"/><a:buFont typeface="Arial"/><a:buNone/></a:pPr><a:r><a:t></a:t></a:r><a:endParaRPr b="0" i="0" sz="1400" u="none" cap="none" strike="noStrike"><a:solidFill><a:srgbClr val="000000"/></a:solidFill><a:latin typeface="Arial"/><a:ea typeface="Arial"/><a:cs typeface="Arial"/><a:sym typeface="Arial"/></a:endParaRPr></a:p></p:txBody></p:sp><p:pic><p:nvPicPr><p:cNvPr id="181" name="Google Shape;181;p25"/><p:cNvPicPr preferRelativeResize="0"/><p:nvPr/></p:nvPicPr><p:blipFill rotWithShape="1"><a:blip r:embed="rId3"><a:alphaModFix/></a:blip><a:srcRect b="0" l="0" r="0" t="0"/><a:stretch/></p:blipFill><p:spPr><a:xfrm><a:off x="463375" y="482852"/><a:ext cx="576900" cy="385904"/></a:xfrm><a:prstGeom prst="rect"><a:avLst/></a:prstGeom><a:noFill/><a:ln><a:noFill/></a:ln></p:spPr></p:pic><p:sp><p:nvSpPr><p:cNvPr id="182" name="Google Shape;182;p25"/><p:cNvSpPr txBox="1"/><p:nvPr/></p:nvSpPr><p:spPr><a:xfrm><a:off x="1261450" y="1017575"/><a:ext cx="1902900" cy="461700"/></a:xfrm><a:prstGeom prst="rect"><a:avLst/></a:prstGeom><a:noFill/><a:ln><a:noFill/></a:ln></p:spPr><p:txBody><a:bodyPr anchorCtr="0" anchor="t" bIns="91425" lIns="91425" spcFirstLastPara="1" rIns="91425" wrap="square" tIns="91425"><a:spAutoFit/></a:bodyPr><a:lstStyle/><a:p><a:pPr indent="0" lvl="0" marL="0" rtl="0" algn="l"><a:spcBef><a:spcPts val="0"/></a:spcBef><a:spcAft><a:spcPts val="0"/></a:spcAft><a:buNone/></a:pPr><a:r><a:rPr lang="fr" sz="1800"><a:solidFill><a:schemeClr val="dk2"/></a:solidFill></a:rPr><a:t>Six étapes, une seule chaîne</a:t></a:r><a:endParaRPr sz="1800"><a:solidFill><a:schemeClr val="dk2"/></a:solidFill></a:endParaRPr></a:p></p:txBody></p:sp><p:sp><p:nvSpPr><p:cNvPr id="183" name="Google Shape;183;p25"/><p:cNvSpPr/><p:nvPr/></p:nvSpPr><p:spPr><a:xfrm><a:off x="650300" y="1861675"/><a:ext cx="2382600" cy="1248600"/></a:xfrm><a:prstGeom prst="roundRect"><a:avLst><a:gd fmla="val 11687" name="adj"/></a:avLst></a:prstGeom><a:solidFill><a:srgbClr val="FFFFFF"/></a:solidFill><a:ln cap="flat" cmpd="sng" w="9525"><a:solidFill><a:srgbClr val="FF7047"/></a:solidFill><a:prstDash val="solid"/><a:round/><a:headEnd len="sm" w="sm" type="none"/><a:tailEnd len="sm" w="sm" type="none"/>Ingestion idempotente depuis l'API Steam</a:t></a:r><a:endParaRPr/></a:p></p:txBody></p:sp><p:sp><p:nvSpPr><p:cNvPr id="184" name="Google Shape;184;p25"/><p:cNvSpPr/><p:nvPr/></p:nvSpPr><p:spPr><a:xfrm><a:off x="3264775" y="1861675"/><a:ext cx="1856100" cy="1248600"/></a:xfrm><a:prstGeom prst="roundRect"><a:avLst><a:gd fmla="val 11687" name="adj"/></a:avLst></a:prstGeom><a:solidFill><a:srgbClr val="FFFFFF"/></a:solidFill><a:ln cap="flat" cmpd="sng" w="9525"><a:solidFill><a:srgbClr val="FF7047"/></a:solidFill><a:prstDash val="solid"/><a:round/><a:headEnd len="sm" w="sm" type="none"/><a:tailEnd len="sm" w="sm" type="none"/ xml:space="preserve">Zone silver : </a:t></a:r><a:r><a:rPr lang="fr" sz="1650"><a:solidFill><a:srgbClr val="55575A"/></a:solidFill><a:latin typeface="Manrope"/><a:ea typeface="Manrope"/><a:cs typeface="Manrope"/><a:sym typeface="Manrope"/></a:rPr><a:t>PySpark et Iceberg</a:t></a:r><a:endParaRPr/></a:p></p:txBody></p:sp><p:sp><p:nvSpPr><p:cNvPr id="185" name="Google Shape;185;p25"/><p:cNvSpPr/><p:nvPr/></p:nvSpPr><p:spPr><a:xfrm><a:off x="5352750" y="1861675"/><a:ext cx="2877300" cy="1248600"/></a:xfrm><a:prstGeom prst="roundRect"><a:avLst><a:gd fmla="val 11687" name="adj"/></a:avLst></a:prstGeom><a:solidFill><a:srgbClr val="FFFFFF"/></a:solidFill><a:ln cap="flat" cmpd="sng" w="9525"><a:solidFill><a:srgbClr val="FF7047"/></a:solidFill><a:prstDash val="solid"/><a:round/><a:headEnd len="sm" w="sm" type="none"/><a:tailEnd len="sm" w="sm" type="none"/ xml:space="preserve">Zone gold : </a:t></a:r><a:br><a:rPr b="1" lang="fr" sz="1650"><a:solidFill><a:srgbClr val="55575A"/></a:solidFill><a:latin typeface="Manrope"/><a:ea typeface="Manrope"/><a:cs typeface="Manrope"/><a:sym typeface="Manrope"/></a:rPr></a:br><a:r><a:rPr lang="fr" sz="1650"><a:solidFill><a:srgbClr val="55575A"/></a:solidFill><a:latin typeface="Manrope"/><a:ea typeface="Manrope"/><a:cs typeface="Manrope"/><a:sym typeface="Manrope"/></a:rPr><a:t>dbt et DuckDB, 43 tests verts — ADR 0013, 0014</a:t></a:r><a:endParaRPr/></a:p></p:txBody></p:sp></p:spTree></p:cSld><p:clrMapOvr><a:masterClrMapping/></p:clrMapOvr></p:sld>
 </file>
 
 <file path=ppt/slides/slide14.xml><?xml version="1.0" encoding="utf-8"?>
@@ -8423,7 +8423,7 @@
                   <a:srgbClr val="FFFFFF"/>
                 </a:highlight>
               </a:rPr>
-              <a:t>Seuil de décision appris, et non fixé à 0,5</a:t>
+              <a:t>Seuil de décision appris, et non fixé à 0,5 — ADR 0006, 0007</a:t>
             </a:r>
             <a:endParaRPr sz="1200">
               <a:solidFill>
@@ -9037,7 +9037,7 @@
                   <a:schemeClr val="dk2"/>
                 </a:solidFill>
               </a:rPr>
-              <a:t>Un modèle à métriques égales n'est pas promu : la barrière l'a refusé en conditions réelles.</a:t>
+              <a:t>Un modèle à métriques égales n'est pas promu : la barrière l'a refusé en conditions réelles. ADR 0008.</a:t>
             </a:r>
             <a:endParaRPr b="1" sz="2400">
               <a:solidFill>
@@ -9746,7 +9746,7 @@
                   <a:srgbClr val="FFFFFF"/>
                 </a:highlight>
               </a:rPr>
-              <a:t>Socle réemployable pour les blocs AIA et CDSD</a:t>
+              <a:t>Socle réemployable pour les blocs AIA et CDSD — 20 décisions écrites, ADR 0001 à 0020</a:t>
             </a:r>
             <a:endParaRPr sz="1300">
               <a:solidFill>

--- a/docs/presentation/ReviewPulse_DemoDay.pptx
+++ b/docs/presentation/ReviewPulse_DemoDay.pptx
@@ -9376,7 +9376,7 @@
                   <a:srgbClr val="FFFFFF"/>
                 </a:highlight>
               </a:rPr>
-              <a:t>DAG Airflow quotidien : 6 tâches sur 6, base PostgreSQL</a:t>
+              <a:t>DAG Airflow quotidien : 9 tâches, base PostgreSQL</a:t>
             </a:r>
             <a:endParaRPr sz="1300">
               <a:solidFill>
@@ -9414,7 +9414,7 @@
                   <a:srgbClr val="FFFFFF"/>
                 </a:highlight>
               </a:rPr>
-              <a:t>Test de la stack déployée : 14 contrôles sur 14</a:t>
+              <a:t>Test de la stack déployée : 16 contrôles sur 16</a:t>
             </a:r>
             <a:endParaRPr sz="1300">
               <a:solidFill>
@@ -9452,7 +9452,7 @@
                   <a:srgbClr val="FFFFFF"/>
                 </a:highlight>
               </a:rPr>
-              <a:t>Dérive des données et des prédictions mesurée à chaque passage</a:t>
+              <a:t>Dérive mesurée à chaque passage, alerte écrite hors du journal, réentraînement déclenché</a:t>
             </a:r>
             <a:endParaRPr sz="1300">
               <a:solidFill>
@@ -9490,7 +9490,7 @@
                   <a:srgbClr val="FFFFFF"/>
                 </a:highlight>
               </a:rPr>
-              <a:t>Retour arrière outillé : l'alias champion revient sur une version antérieure</a:t>
+              <a:t>Retour arrière outillé sur le modèle et sur les données : alias MLflow, instantanés Iceberg</a:t>
             </a:r>
             <a:endParaRPr sz="1300">
               <a:solidFill>
@@ -9523,7 +9523,7 @@
                   <a:srgbClr val="FFFFFF"/>
                 </a:highlight>
               </a:rPr>
-              <a:t>Prochaines étapes</a:t>
+              <a:t>Prochaines étapes — annoncées comme telles, rien n'en est fait</a:t>
             </a:r>
             <a:endParaRPr b="1" sz="1300">
               <a:solidFill>
@@ -9541,120 +9541,6 @@
               </a:lnSpc>
               <a:spcBef>
                 <a:spcPts val="1200"/>
-              </a:spcBef>
-              <a:spcAft>
-                <a:spcPts val="0"/>
-              </a:spcAft>
-              <a:buClr>
-                <a:schemeClr val="dk2"/>
-              </a:buClr>
-              <a:buSzPts val="1300"/>
-              <a:buFont typeface="Arial"/>
-              <a:buChar char="●"/>
-            </a:pPr>
-            <a:r>
-              <a:rPr lang="fr" sz="1300">
-                <a:solidFill>
-                  <a:schemeClr val="dk2"/>
-                </a:solidFill>
-                <a:highlight>
-                  <a:srgbClr val="FFFFFF"/>
-                </a:highlight>
-              </a:rPr>
-              <a:t>Alerte hors journal et réentraînement déclenché par la dérive</a:t>
-            </a:r>
-            <a:endParaRPr sz="1300">
-              <a:solidFill>
-                <a:schemeClr val="dk2"/>
-              </a:solidFill>
-              <a:highlight>
-                <a:srgbClr val="FFFFFF"/>
-              </a:highlight>
-            </a:endParaRPr>
-          </a:p>
-          <a:p>
-            <a:pPr indent="-311150" lvl="0" marL="457200" rtl="0" algn="l">
-              <a:lnSpc>
-                <a:spcPct val="115000"/>
-              </a:lnSpc>
-              <a:spcBef>
-                <a:spcPts val="0"/>
-              </a:spcBef>
-              <a:spcAft>
-                <a:spcPts val="0"/>
-              </a:spcAft>
-              <a:buClr>
-                <a:schemeClr val="dk2"/>
-              </a:buClr>
-              <a:buSzPts val="1300"/>
-              <a:buFont typeface="Arial"/>
-              <a:buChar char="●"/>
-            </a:pPr>
-            <a:r>
-              <a:rPr lang="fr" sz="1300">
-                <a:solidFill>
-                  <a:schemeClr val="dk2"/>
-                </a:solidFill>
-                <a:highlight>
-                  <a:srgbClr val="FFFFFF"/>
-                </a:highlight>
-              </a:rPr>
-              <a:t>Restauration d'un instantané Iceberg, images épinglées par empreinte</a:t>
-            </a:r>
-            <a:endParaRPr sz="1300">
-              <a:solidFill>
-                <a:schemeClr val="dk2"/>
-              </a:solidFill>
-              <a:highlight>
-                <a:srgbClr val="FFFFFF"/>
-              </a:highlight>
-            </a:endParaRPr>
-          </a:p>
-          <a:p>
-            <a:pPr indent="-311150" lvl="0" marL="457200" rtl="0" algn="l">
-              <a:lnSpc>
-                <a:spcPct val="115000"/>
-              </a:lnSpc>
-              <a:spcBef>
-                <a:spcPts val="0"/>
-              </a:spcBef>
-              <a:spcAft>
-                <a:spcPts val="0"/>
-              </a:spcAft>
-              <a:buClr>
-                <a:schemeClr val="dk2"/>
-              </a:buClr>
-              <a:buSzPts val="1300"/>
-              <a:buFont typeface="Arial"/>
-              <a:buChar char="●"/>
-            </a:pPr>
-            <a:r>
-              <a:rPr lang="fr" sz="1300">
-                <a:solidFill>
-                  <a:schemeClr val="dk2"/>
-                </a:solidFill>
-                <a:highlight>
-                  <a:srgbClr val="FFFFFF"/>
-                </a:highlight>
-              </a:rPr>
-              <a:t>Kafka pour le temps réel, stockage objet compatible S3</a:t>
-            </a:r>
-            <a:endParaRPr sz="1300">
-              <a:solidFill>
-                <a:schemeClr val="dk2"/>
-              </a:solidFill>
-              <a:highlight>
-                <a:srgbClr val="FFFFFF"/>
-              </a:highlight>
-            </a:endParaRPr>
-          </a:p>
-          <a:p>
-            <a:pPr indent="-311150" lvl="0" marL="457200" rtl="0" algn="l">
-              <a:lnSpc>
-                <a:spcPct val="115000"/>
-              </a:lnSpc>
-              <a:spcBef>
-                <a:spcPts val="0"/>
               </a:spcBef>
               <a:spcAft>
                 <a:spcPts val="0"/>
@@ -9676,6 +9562,120 @@
                 </a:highlight>
               </a:rPr>
               <a:t>Publication du dépôt et chaîne d'intégration verte</a:t>
+            </a:r>
+            <a:endParaRPr sz="1300">
+              <a:solidFill>
+                <a:schemeClr val="dk2"/>
+              </a:solidFill>
+              <a:highlight>
+                <a:srgbClr val="FFFFFF"/>
+              </a:highlight>
+            </a:endParaRPr>
+          </a:p>
+          <a:p>
+            <a:pPr indent="-311150" lvl="0" marL="457200" rtl="0" algn="l">
+              <a:lnSpc>
+                <a:spcPct val="115000"/>
+              </a:lnSpc>
+              <a:spcBef>
+                <a:spcPts val="0"/>
+              </a:spcBef>
+              <a:spcAft>
+                <a:spcPts val="0"/>
+              </a:spcAft>
+              <a:buClr>
+                <a:schemeClr val="dk2"/>
+              </a:buClr>
+              <a:buSzPts val="1300"/>
+              <a:buFont typeface="Arial"/>
+              <a:buChar char="●"/>
+            </a:pPr>
+            <a:r>
+              <a:rPr lang="fr" sz="1300">
+                <a:solidFill>
+                  <a:schemeClr val="dk2"/>
+                </a:solidFill>
+                <a:highlight>
+                  <a:srgbClr val="FFFFFF"/>
+                </a:highlight>
+              </a:rPr>
+              <a:t>Essai de charge de l'API : le référentiel demande l'orchestration sous charge</a:t>
+            </a:r>
+            <a:endParaRPr sz="1300">
+              <a:solidFill>
+                <a:schemeClr val="dk2"/>
+              </a:solidFill>
+              <a:highlight>
+                <a:srgbClr val="FFFFFF"/>
+              </a:highlight>
+            </a:endParaRPr>
+          </a:p>
+          <a:p>
+            <a:pPr indent="-311150" lvl="0" marL="457200" rtl="0" algn="l">
+              <a:lnSpc>
+                <a:spcPct val="115000"/>
+              </a:lnSpc>
+              <a:spcBef>
+                <a:spcPts val="0"/>
+              </a:spcBef>
+              <a:spcAft>
+                <a:spcPts val="0"/>
+              </a:spcAft>
+              <a:buClr>
+                <a:schemeClr val="dk2"/>
+              </a:buClr>
+              <a:buSzPts val="1300"/>
+              <a:buFont typeface="Arial"/>
+              <a:buChar char="●"/>
+            </a:pPr>
+            <a:r>
+              <a:rPr lang="fr" sz="1300">
+                <a:solidFill>
+                  <a:schemeClr val="dk2"/>
+                </a:solidFill>
+                <a:highlight>
+                  <a:srgbClr val="FFFFFF"/>
+                </a:highlight>
+              </a:rPr>
+              <a:t>Kafka pour le temps réel, stockage objet compatible S3, infrastructure en Terraform</a:t>
+            </a:r>
+            <a:endParaRPr sz="1300">
+              <a:solidFill>
+                <a:schemeClr val="dk2"/>
+              </a:solidFill>
+              <a:highlight>
+                <a:srgbClr val="FFFFFF"/>
+              </a:highlight>
+            </a:endParaRPr>
+          </a:p>
+          <a:p>
+            <a:pPr indent="-311150" lvl="0" marL="457200" rtl="0" algn="l">
+              <a:lnSpc>
+                <a:spcPct val="115000"/>
+              </a:lnSpc>
+              <a:spcBef>
+                <a:spcPts val="0"/>
+              </a:spcBef>
+              <a:spcAft>
+                <a:spcPts val="0"/>
+              </a:spcAft>
+              <a:buClr>
+                <a:schemeClr val="dk2"/>
+              </a:buClr>
+              <a:buSzPts val="1300"/>
+              <a:buFont typeface="Arial"/>
+              <a:buChar char="●"/>
+            </a:pPr>
+            <a:r>
+              <a:rPr lang="fr" sz="1300">
+                <a:solidFill>
+                  <a:schemeClr val="dk2"/>
+                </a:solidFill>
+                <a:highlight>
+                  <a:srgbClr val="FFFFFF"/>
+                </a:highlight>
+              </a:rPr>
+              <a:t>Cible Kubernetes, déjà documentée : une image par rôle, `KubernetesPodOperator` (ADR 0012, 0013)</a:t>
             </a:r>
             <a:endParaRPr sz="1300">
               <a:solidFill>

--- a/docs/presentation/ReviewPulse_DemoDay.pptx
+++ b/docs/presentation/ReviewPulse_DemoDay.pptx
@@ -8949,7 +8949,7 @@
                   <a:schemeClr val="dk2"/>
                 </a:solidFill>
               </a:rPr>
-              <a:t>73 verts</a:t>
+              <a:t>125 verts</a:t>
             </a:r>
             <a:r>
               <a:rPr lang="fr" sz="2400">
@@ -8957,7 +8957,7 @@
                   <a:schemeClr val="dk2"/>
                 </a:solidFill>
               </a:rPr>
-              <a:t xml:space="preserve"> ; 16 mutations sur 16 détectées</a:t>
+              <a:t xml:space="preserve"> ; 26 mutations sur 26 détectées</a:t>
             </a:r>
             <a:endParaRPr sz="2400">
               <a:solidFill>
@@ -10639,7 +10639,7 @@
 </file>
 
 <file path=ppt/slides/slide6.xml><?xml version="1.0" encoding="UTF-8" standalone="yes"?>-<p:sld xmlns:a="http://schemas.openxmlformats.org/drawingml/2006/main" xmlns:r="http://schemas.openxmlformats.org/officeDocument/2006/relationships" xmlns:mc="http://schemas.openxmlformats.org/markup-compatibility/2006" xmlns:mv="urn:schemas-microsoft-com:mac:vml" xmlns:p="http://schemas.openxmlformats.org/presentationml/2006/main" xmlns:c="http://schemas.openxmlformats.org/drawingml/2006/chart" xmlns:dgm="http://schemas.openxmlformats.org/drawingml/2006/diagram" xmlns:o="urn:schemas-microsoft-com:office:office" xmlns:v="urn:schemas-microsoft-com:vml" xmlns:pvml="urn:schemas-microsoft-com:office:powerpoint" xmlns:com="http://schemas.openxmlformats.org/drawingml/2006/compatibility" xmlns:p14="http://schemas.microsoft.com/office/powerpoint/2010/main" xmlns:p15="http://schemas.microsoft.com/office/powerpoint/2012/main" xmlns:ahyp="http://schemas.microsoft.com/office/drawing/2018/hyperlinkcolor"><p:cSld><p:spTree><p:nvGrpSpPr><p:cNvPr id="101" name="Shape 101"/><p:cNvGrpSpPr/><p:nvPr/></p:nvGrpSpPr><p:grpSpPr><a:xfrm><a:off x="0" y="0"/><a:ext cx="0" cy="0"/><a:chOff x="0" y="0"/><a:chExt cx="0" cy="0"/></a:xfrm></p:grpSpPr><p:sp><p:nvSpPr><p:cNvPr id="102" name="Google Shape;102;p18"/><p:cNvSpPr txBox="1"/><p:nvPr><p:ph idx="4294967295" type="ctrTitle"/></p:nvPr></p:nvSpPr><p:spPr><a:xfrm><a:off x="1073814" y="409334"/><a:ext cx="5315100" cy="533100"/></a:xfrm><a:prstGeom prst="rect"><a:avLst/></a:prstGeom><a:noFill/><a:ln><a:noFill/></a:ln></p:spPr><p:txBody><a:bodyPr anchorCtr="0" anchor="t" bIns="91425" lIns="91425" spcFirstLastPara="1" rIns="91425" wrap="square" tIns="91425"><a:noAutofit/></a:bodyPr><a:lstStyle/><a:p><a:pPr indent="0" lvl="0" marL="0" marR="0" rtl="0" algn="l"><a:lnSpc><a:spcPct val="100000"/></a:lnSpc><a:spcBef><a:spcPts val="0"/></a:spcBef><a:spcAft><a:spcPts val="0"/></a:spcAft><a:buNone/></a:pPr><a:r><a:rPr lang="fr" sz="2500"><a:solidFill><a:srgbClr val="0E3449"/></a:solidFill><a:latin typeface="Inter SemiBold"/><a:ea typeface="Inter SemiBold"/><a:cs typeface="Inter SemiBold"/><a:sym typeface="Inter SemiBold"/></a:rPr><a:t>2.   Les données</a:t></a:r><a:endParaRPr i="0" sz="2500" u="none" cap="none" strike="noStrike"><a:solidFill><a:srgbClr val="0E3449"/></a:solidFill><a:latin typeface="Inter SemiBold"/><a:ea typeface="Inter SemiBold"/><a:cs typeface="Inter SemiBold"/><a:sym typeface="Inter SemiBold"/></a:endParaRPr></a:p></p:txBody></p:sp><p:sp><p:nvSpPr><p:cNvPr id="103" name="Google Shape;103;p18"/><p:cNvSpPr/><p:nvPr/></p:nvSpPr><p:spPr><a:xfrm><a:off x="43775" y="4892100"/><a:ext cx="9144000" cy="251400"/></a:xfrm><a:prstGeom prst="rect"><a:avLst/></a:prstGeom><a:solidFill><a:srgbClr val="C3FFFC"/></a:solidFill><a:ln><a:noFill/></a:ln></p:spPr><p:txBody><a:bodyPr anchorCtr="0" anchor="ctr" bIns="91425" lIns="91425" spcFirstLastPara="1" rIns="91425" wrap="square" tIns="91425"><a:noAutofit/></a:bodyPr><a:lstStyle/><a:p><a:pPr indent="0" lvl="0" marL="0" marR="0" rtl="0" algn="l"><a:lnSpc><a:spcPct val="100000"/></a:lnSpc><a:spcBef><a:spcPts val="0"/></a:spcBef><a:spcAft><a:spcPts val="0"/></a:spcAft><a:buClr><a:srgbClr val="000000"/></a:buClr><a:buSzPts val="1400"/><a:buFont typeface="Arial"/><a:buNone/></a:pPr><a:r><a:t></a:t></a:r><a:endParaRPr b="0" i="0" sz="1400" u="none" cap="none" strike="noStrike"><a:solidFill><a:srgbClr val="000000"/></a:solidFill><a:latin typeface="Arial"/><a:ea typeface="Arial"/><a:cs typeface="Arial"/><a:sym typeface="Arial"/></a:endParaRPr></a:p></p:txBody></p:sp><p:pic><p:nvPicPr><p:cNvPr id="104" name="Google Shape;104;p18"/><p:cNvPicPr preferRelativeResize="0"/><p:nvPr/></p:nvPicPr><p:blipFill rotWithShape="1"><a:blip r:embed="rId3"><a:alphaModFix/></a:blip><a:srcRect b="0" l="0" r="0" t="0"/><a:stretch/></p:blipFill><p:spPr><a:xfrm><a:off x="496925" y="482927"/><a:ext cx="576900" cy="385904"/></a:xfrm><a:prstGeom prst="rect"><a:avLst/></a:prstGeom><a:noFill/><a:ln><a:noFill/></a:ln></p:spPr></p:pic><p:sp><p:nvSpPr><p:cNvPr id="105" name="Google Shape;105;p18"/><p:cNvSpPr txBox="1"/><p:nvPr/></p:nvSpPr><p:spPr><a:xfrm><a:off x="3518399" y="329500"/><a:ext cx="5163600" cy="738900"/></a:xfrm><a:prstGeom prst="rect"><a:avLst/></a:prstGeom><a:noFill/><a:ln><a:noFill/></a:ln></p:spPr><p:txBody><a:bodyPr anchorCtr="0" anchor="t" bIns="91425" lIns="91425" spcFirstLastPara="1" rIns="91425" wrap="square" tIns="91425"><a:spAutoFit/></a:bodyPr><a:lstStyle/><a:p><a:pPr indent="0" lvl="0" marL="0" rtl="0" algn="l"><a:spcBef><a:spcPts val="0"/></a:spcBef><a:spcAft><a:spcPts val="0"/></a:spcAft><a:buNone/></a:pPr><a:r><a:rPr lang="fr" sz="1800"><a:solidFill><a:schemeClr val="dk2"/></a:solidFill></a:rPr><a:t>API publique des avis Steam</a:t></a:r><a:br><a:rPr lang="fr" sz="1800"><a:solidFill><a:schemeClr val="dk2"/></a:solidFill></a:rPr></a:br><a:r><a:rPr lang="fr" sz="1800"><a:solidFill><a:schemeClr val="dk2"/></a:solidFill></a:rPr><a:t>9 054 lignes brutes — 3 jeux, anglais et français</a:t></a:r><a:endParaRPr sz="1800"><a:solidFill><a:schemeClr val="dk2"/></a:solidFill></a:endParaRPr></a:p></p:txBody></p:sp><p:sp><p:nvSpPr><p:cNvPr id="106" name="Google Shape;106;p18"/><p:cNvSpPr/><p:nvPr/></p:nvSpPr><p:spPr><a:xfrm><a:off x="402939" y="1156461"/><a:ext cx="3615000" cy="193800"/></a:xfrm><a:prstGeom prst="rect"><a:avLst/></a:prstGeom><a:noFill/><a:ln><a:noFill/></a:ln></p:spPr><p:txBody><a:bodyPr anchorCtr="0" anchor="t" bIns="0" lIns="0" spcFirstLastPara="1" rIns="0" wrap="square" tIns="0"><a:noAutofit/></a:bodyPr><a:lstStyle/><a:p><a:pPr indent="0" lvl="0" marL="0" marR="0" rtl="0" algn="l"><a:lnSpc><a:spcPct val="125000"/></a:lnSpc><a:spcBef><a:spcPts val="0"/></a:spcBef><a:spcAft><a:spcPts val="0"/></a:spcAft><a:buClr><a:srgbClr val="0C0D0F"/></a:buClr><a:buSzPts val="1217"/><a:buFont typeface="Inter"/><a:buNone/></a:pPr><a:r><a:rPr lang="fr" sz="1217"><a:solidFill><a:srgbClr val="0C0D0F"/></a:solidFill><a:latin typeface="Inter"/><a:ea typeface="Inter"/><a:cs typeface="Inter"/><a:sym typeface="Inter"/></a:rPr><a:t>Traitement en 5 étapes, testé à chaque passage</a:t></a:r><a:endParaRPr b="0" i="0" sz="1217" u="none" cap="none" strike="noStrike"/></a:p></p:txBody></p:sp><p:sp><p:nvSpPr><p:cNvPr id="107" name="Google Shape;107;p18"/><p:cNvSpPr/><p:nvPr/></p:nvSpPr><p:spPr><a:xfrm><a:off x="402961" y="1448759"/><a:ext cx="1498200" cy="711900"/></a:xfrm><a:prstGeom prst="roundRect"><a:avLst><a:gd fmla="val 11687" name="adj"/></a:avLst></a:prstGeom><a:solidFill><a:srgbClr val="FFFFFF"/></a:solidFill><a:ln cap="flat" cmpd="sng" w="8125"><a:solidFill><a:srgbClr val="FF7047"/></a:solidFill><a:prstDash val="solid"/><a:round/><a:headEnd len="sm" w="sm" type="none"/><a:tailEnd len="sm" w="sm" type="none"/ xml:space="preserve"> 1. </a:t></a:r><a:r><a:rPr b="1" lang="fr" sz="1054"><a:solidFill><a:srgbClr val="55575A"/></a:solidFill><a:latin typeface="Manrope"/><a:ea typeface="Manrope"/><a:cs typeface="Manrope"/><a:sym typeface="Manrope"/></a:rPr><a:t>Zone brute inchangée</a:t></a:r><a:endParaRPr b="1" sz="1054"><a:solidFill><a:srgbClr val="55575A"/></a:solidFill><a:latin typeface="Manrope"/><a:ea typeface="Manrope"/><a:cs typeface="Manrope"/><a:sym typeface="Manrope"/></a:endParaRPr></a:p></p:txBody></p:sp><p:sp><p:nvSpPr><p:cNvPr id="108" name="Google Shape;108;p18"/><p:cNvSpPr/><p:nvPr/></p:nvSpPr><p:spPr><a:xfrm><a:off x="2194798" y="1438311"/><a:ext cx="1498200" cy="711900"/></a:xfrm><a:prstGeom prst="roundRect"><a:avLst><a:gd fmla="val 11687" name="adj"/></a:avLst></a:prstGeom><a:solidFill><a:srgbClr val="FFFFFF"/></a:solidFill><a:ln cap="flat" cmpd="sng" w="8125"><a:solidFill><a:srgbClr val="FF7047"/></a:solidFill><a:prstDash val="solid"/><a:round/><a:headEnd len="sm" w="sm" type="none"/><a:tailEnd len="sm" w="sm" type="none"/ xml:space="preserve">2. Dédoublonnage </a:t></a:r><a:br><a:rPr b="1" lang="fr" sz="1000"><a:solidFill><a:srgbClr val="55575A"/></a:solidFill><a:latin typeface="Manrope"/><a:ea typeface="Manrope"/><a:cs typeface="Manrope"/><a:sym typeface="Manrope"/></a:rPr></a:br><a:r><a:rPr b="1" lang="fr" sz="1000"><a:solidFill><a:srgbClr val="55575A"/></a:solidFill><a:latin typeface="Manrope"/><a:ea typeface="Manrope"/><a:cs typeface="Manrope"/><a:sym typeface="Manrope"/></a:rPr><a:t>et nettoyage du BBCode</a:t></a:r><a:endParaRPr b="1" sz="1000"><a:solidFill><a:srgbClr val="55575A"/></a:solidFill><a:latin typeface="Manrope"/><a:ea typeface="Manrope"/><a:cs typeface="Manrope"/><a:sym typeface="Manrope"/></a:endParaRPr></a:p></p:txBody></p:sp><p:sp><p:nvSpPr><p:cNvPr id="109" name="Google Shape;109;p18"/><p:cNvSpPr/><p:nvPr/></p:nvSpPr><p:spPr><a:xfrm><a:off x="3764412" y="1449638"/><a:ext cx="1498200" cy="711900"/></a:xfrm><a:prstGeom prst="roundRect"><a:avLst><a:gd fmla="val 11687" name="adj"/></a:avLst></a:prstGeom><a:solidFill><a:srgbClr val="FFFFFF"/></a:solidFill><a:ln cap="flat" cmpd="sng" w="8125"><a:solidFill><a:srgbClr val="FF7047"/></a:solidFill><a:prstDash val="solid"/><a:round/><a:headEnd len="sm" w="sm" type="none"/><a:tailEnd len="sm" w="sm" type="none"/>3. Pseudonymisation HMAC</a:t></a:r><a:endParaRPr b="1" sz="1200"><a:solidFill><a:srgbClr val="55575A"/></a:solidFill><a:latin typeface="Manrope"/><a:ea typeface="Manrope"/><a:cs typeface="Manrope"/><a:sym typeface="Manrope"/></a:endParaRPr></a:p></p:txBody></p:sp><p:sp><p:nvSpPr><p:cNvPr id="110" name="Google Shape;110;p18"/><p:cNvSpPr/><p:nvPr/></p:nvSpPr><p:spPr><a:xfrm><a:off x="5351099" y="1449650"/><a:ext cx="1498200" cy="711900"/></a:xfrm><a:prstGeom prst="roundRect"><a:avLst><a:gd fmla="val 11687" name="adj"/></a:avLst></a:prstGeom><a:solidFill><a:srgbClr val="FFFFFF"/></a:solidFill><a:ln cap="flat" cmpd="sng" w="8125"><a:solidFill><a:srgbClr val="FF7047"/></a:solidFill><a:prstDash val="solid"/><a:round/><a:headEnd len="sm" w="sm" type="none"/><a:tailEnd len="sm" w="sm" type="none"/>4. Contrôles bloquants</a:t></a:r><a:endParaRPr b="1" sz="1200"><a:solidFill><a:srgbClr val="55575A"/></a:solidFill><a:latin typeface="Manrope"/><a:ea typeface="Manrope"/><a:cs typeface="Manrope"/><a:sym typeface="Manrope"/></a:endParaRPr></a:p></p:txBody></p:sp><p:sp><p:nvSpPr><p:cNvPr id="111" name="Google Shape;111;p18"/><p:cNvSpPr/><p:nvPr/></p:nvSpPr><p:spPr><a:xfrm><a:off x="6937799" y="1460100"/><a:ext cx="1498200" cy="711900"/></a:xfrm><a:prstGeom prst="roundRect"><a:avLst><a:gd fmla="val 11687" name="adj"/></a:avLst></a:prstGeom><a:solidFill><a:srgbClr val="FFFFFF"/></a:solidFill><a:ln cap="flat" cmpd="sng" w="8125"><a:solidFill><a:srgbClr val="FF7047"/></a:solidFill><a:prstDash val="solid"/><a:round/><a:headEnd len="sm" w="sm" type="none"/><a:tailEnd len="sm" w="sm" type="none"/>5. Great Expectations</a:t></a:r><a:endParaRPr b="1" sz="1200"><a:solidFill><a:srgbClr val="55575A"/></a:solidFill><a:latin typeface="Manrope"/><a:ea typeface="Manrope"/><a:cs typeface="Manrope"/><a:sym typeface="Manrope"/></a:endParaRPr></a:p></p:txBody></p:sp><p:sp><p:nvSpPr><p:cNvPr id="112" name="Google Shape;112;p18"/><p:cNvSpPr txBox="1"/><p:nvPr/></p:nvSpPr><p:spPr><a:xfrm><a:off x="402950" y="2701550"/><a:ext cx="8033100" cy="1639200"/></a:xfrm><a:prstGeom prst="rect"><a:avLst/></a:prstGeom><a:noFill/><a:ln><a:noFill/></a:ln></p:spPr><p:txBody><a:bodyPr anchorCtr="0" anchor="t" bIns="91425" lIns="91425" spcFirstLastPara="1" rIns="91425" wrap="square" tIns="91425"><a:spAutoFit/></a:bodyPr><a:lstStyle/><a:p><a:pPr indent="0" lvl="0" marL="0" rtl="0" algn="l"><a:lnSpc><a:spcPct val="115000"/></a:lnSpc><a:spcBef><a:spcPts val="0"/></a:spcBef><a:spcAft><a:spcPts val="0"/></a:spcAft><a:buNone/></a:pPr><a:r><a:rPr b="1" lang="fr"><a:solidFill><a:srgbClr val="015955"/></a:solidFill><a:highlight><a:schemeClr val="lt1"/></a:highlight></a:rPr><a:t>Confidentialité :</a:t></a:r><a:r><a:rPr lang="fr"><a:solidFill><a:srgbClr val="27251E"/></a:solidFill><a:highlight><a:schemeClr val="lt1"/></a:highlight></a:rPr><a:t> </a:t></a:r><a:endParaRPr><a:solidFill><a:srgbClr val="27251E"/></a:solidFill><a:highlight><a:schemeClr val="lt1"/></a:highlight></a:endParaRPr></a:p><a:p><a:pPr indent="-317500" lvl="0" marL="457200" rtl="0" algn="l"><a:lnSpc><a:spcPct val="115000"/></a:lnSpc><a:spcBef><a:spcPts val="0"/></a:spcBef><a:spcAft><a:spcPts val="0"/></a:spcAft><a:buClr><a:schemeClr val="dk2"/></a:buClr><a:buSzPts val="1400"/><a:buChar char="●"/></a:pPr><a:r><a:rPr lang="fr"><a:solidFill><a:schemeClr val="dk2"/></a:solidFill><a:highlight><a:schemeClr val="lt1"/></a:highlight></a:rPr><a:t>steamid</a:t></a:r><a:r><a:rPr lang="fr"><a:solidFill><a:schemeClr val="dk2"/></a:solidFill></a:rPr><a:t xml:space="preserve"> </a:t></a:r><a:r><a:rPr b="1" lang="fr"><a:solidFill><a:schemeClr val="dk2"/></a:solidFill></a:rPr><a:t>→ pseudonymisé (HMAC salé)</a:t></a:r><a:endParaRPr b="1"><a:solidFill><a:schemeClr val="dk2"/></a:solidFill></a:endParaRPr></a:p><a:p><a:pPr indent="-317500" lvl="0" marL="457200" rtl="0" algn="l"><a:lnSpc><a:spcPct val="115000"/></a:lnSpc><a:spcBef><a:spcPts val="0"/></a:spcBef><a:spcAft><a:spcPts val="0"/></a:spcAft><a:buClr><a:schemeClr val="dk2"/></a:buClr><a:buSzPts val="1400"/><a:buChar char="●"/></a:pPr><a:r><a:rPr lang="fr"><a:solidFill><a:schemeClr val="dk2"/></a:solidFill><a:highlight><a:schemeClr val="lt1"/></a:highlight></a:rPr><a:t>personaname, profile_url, avatar : identifiants directs</a:t></a:r><a:r><a:rPr lang="fr"><a:solidFill><a:schemeClr val="dk2"/></a:solidFill></a:rPr><a:t xml:space="preserve"> → </a:t></a:r><a:r><a:rPr b="1" lang="fr"><a:solidFill><a:schemeClr val="dk2"/></a:solidFill></a:rPr><a:t xml:space="preserve">supprimés dès la zone propre </a:t></a:r><a:endParaRPr b="1"><a:solidFill><a:schemeClr val="dk2"/></a:solidFill></a:endParaRPr></a:p><a:p><a:pPr indent="-317500" lvl="0" marL="457200" rtl="0" algn="l"><a:lnSpc><a:spcPct val="115000"/></a:lnSpc><a:spcBef><a:spcPts val="0"/></a:spcBef><a:spcAft><a:spcPts val="0"/></a:spcAft><a:buClr><a:schemeClr val="dk2"/></a:buClr><a:buSzPts val="1400"/><a:buChar char="●"/></a:pPr><a:r><a:rPr lang="fr"><a:solidFill><a:schemeClr val="dk2"/></a:solidFill><a:highlight><a:schemeClr val="lt1"/></a:highlight></a:rPr><a:t>Flux complémentaire</a:t></a:r><a:r><a:rPr lang="fr"><a:solidFill><a:schemeClr val="dk2"/></a:solidFill></a:rPr><a:t xml:space="preserve"> d'avis négatifs </a:t></a:r><a:r><a:rPr b="1" lang="fr"><a:solidFill><a:schemeClr val="dk2"/></a:solidFill></a:rPr><a:t>→ entraînement seulement</a:t></a:r><a:endParaRPr b="1"><a:solidFill><a:schemeClr val="dk2"/></a:solidFill></a:endParaRPr></a:p><a:p><a:pPr indent="-317500" lvl="0" marL="457200" rtl="0" algn="l"><a:lnSpc><a:spcPct val="115000"/></a:lnSpc><a:spcBef><a:spcPts val="0"/></a:spcBef><a:spcAft><a:spcPts val="0"/></a:spcAft><a:buClr><a:schemeClr val="dk2"/></a:buClr><a:buSzPts val="1400"/><a:buChar char="●"/></a:pPr><a:r><a:rPr lang="fr"><a:solidFill><a:schemeClr val="dk2"/></a:solidFill></a:rPr><a:t xml:space="preserve">Idempotence : un second passage n'écrit aucun doublon </a:t></a:r><a:r><a:rPr b="1" lang="fr"><a:solidFill><a:schemeClr val="dk2"/></a:solidFill></a:rPr><a:t>(manifeste)</a:t></a:r><a:endParaRPr><a:solidFill><a:schemeClr val="dk2"/></a:solidFill></a:endParaRPr></a:p><a:p><a:pPr indent="-317500" lvl="0" marL="457200" rtl="0" algn="l"><a:lnSpc><a:spcPct val="115000"/></a:lnSpc><a:spcBef><a:spcPts val="0"/></a:spcBef><a:spcAft><a:spcPts val="0"/></a:spcAft><a:buClr><a:schemeClr val="dk2"/></a:buClr><a:buSzPts val="1400"/><a:buChar char="●"/></a:pPr><a:r><a:rPr lang="fr"><a:solidFill><a:schemeClr val="dk2"/></a:solidFill></a:rPr><a:t xml:space="preserve">Zone silver Iceberg </a:t></a:r><a:r><a:rPr b="1" lang="fr"><a:solidFill><a:schemeClr val="dk2"/></a:solidFill></a:rPr><a:t xml:space="preserve">→ 9 instantanés versionnés </a:t></a:r><a:r><a:rPr lang="fr"><a:solidFill><a:schemeClr val="dk2"/></a:solidFill></a:rPr><a:t></a:t></a:r><a:endParaRPr sz="1800"><a:solidFill><a:schemeClr val="dk2"/></a:solidFill></a:endParaRPr></a:p></p:txBody></p:sp></p:spTree></p:cSld><p:clrMapOvr><a:masterClrMapping/></p:clrMapOvr></p:sld>
+<p:sld xmlns:a="http://schemas.openxmlformats.org/drawingml/2006/main" xmlns:r="http://schemas.openxmlformats.org/officeDocument/2006/relationships" xmlns:mc="http://schemas.openxmlformats.org/markup-compatibility/2006" xmlns:mv="urn:schemas-microsoft-com:mac:vml" xmlns:p="http://schemas.openxmlformats.org/presentationml/2006/main" xmlns:c="http://schemas.openxmlformats.org/drawingml/2006/chart" xmlns:dgm="http://schemas.openxmlformats.org/drawingml/2006/diagram" xmlns:o="urn:schemas-microsoft-com:office:office" xmlns:v="urn:schemas-microsoft-com:vml" xmlns:pvml="urn:schemas-microsoft-com:office:powerpoint" xmlns:com="http://schemas.openxmlformats.org/drawingml/2006/compatibility" xmlns:p14="http://schemas.microsoft.com/office/powerpoint/2010/main" xmlns:p15="http://schemas.microsoft.com/office/powerpoint/2012/main" xmlns:ahyp="http://schemas.microsoft.com/office/drawing/2018/hyperlinkcolor"><p:cSld><p:spTree><p:nvGrpSpPr><p:cNvPr id="101" name="Shape 101"/><p:cNvGrpSpPr/><p:nvPr/></p:nvGrpSpPr><p:grpSpPr><a:xfrm><a:off x="0" y="0"/><a:ext cx="0" cy="0"/><a:chOff x="0" y="0"/><a:chExt cx="0" cy="0"/></a:xfrm></p:grpSpPr><p:sp><p:nvSpPr><p:cNvPr id="102" name="Google Shape;102;p18"/><p:cNvSpPr txBox="1"/><p:nvPr><p:ph idx="4294967295" type="ctrTitle"/></p:nvPr></p:nvSpPr><p:spPr><a:xfrm><a:off x="1073814" y="409334"/><a:ext cx="5315100" cy="533100"/></a:xfrm><a:prstGeom prst="rect"><a:avLst/></a:prstGeom><a:noFill/><a:ln><a:noFill/></a:ln></p:spPr><p:txBody><a:bodyPr anchorCtr="0" anchor="t" bIns="91425" lIns="91425" spcFirstLastPara="1" rIns="91425" wrap="square" tIns="91425"><a:noAutofit/></a:bodyPr><a:lstStyle/><a:p><a:pPr indent="0" lvl="0" marL="0" marR="0" rtl="0" algn="l"><a:lnSpc><a:spcPct val="100000"/></a:lnSpc><a:spcBef><a:spcPts val="0"/></a:spcBef><a:spcAft><a:spcPts val="0"/></a:spcAft><a:buNone/></a:pPr><a:r><a:rPr lang="fr" sz="2500"><a:solidFill><a:srgbClr val="0E3449"/></a:solidFill><a:latin typeface="Inter SemiBold"/><a:ea typeface="Inter SemiBold"/><a:cs typeface="Inter SemiBold"/><a:sym typeface="Inter SemiBold"/></a:rPr><a:t>2.   Les données</a:t></a:r><a:endParaRPr i="0" sz="2500" u="none" cap="none" strike="noStrike"><a:solidFill><a:srgbClr val="0E3449"/></a:solidFill><a:latin typeface="Inter SemiBold"/><a:ea typeface="Inter SemiBold"/><a:cs typeface="Inter SemiBold"/><a:sym typeface="Inter SemiBold"/></a:endParaRPr></a:p></p:txBody></p:sp><p:sp><p:nvSpPr><p:cNvPr id="103" name="Google Shape;103;p18"/><p:cNvSpPr/><p:nvPr/></p:nvSpPr><p:spPr><a:xfrm><a:off x="43775" y="4892100"/><a:ext cx="9144000" cy="251400"/></a:xfrm><a:prstGeom prst="rect"><a:avLst/></a:prstGeom><a:solidFill><a:srgbClr val="C3FFFC"/></a:solidFill><a:ln><a:noFill/></a:ln></p:spPr><p:txBody><a:bodyPr anchorCtr="0" anchor="ctr" bIns="91425" lIns="91425" spcFirstLastPara="1" rIns="91425" wrap="square" tIns="91425"><a:noAutofit/></a:bodyPr><a:lstStyle/><a:p><a:pPr indent="0" lvl="0" marL="0" marR="0" rtl="0" algn="l"><a:lnSpc><a:spcPct val="100000"/></a:lnSpc><a:spcBef><a:spcPts val="0"/></a:spcBef><a:spcAft><a:spcPts val="0"/></a:spcAft><a:buClr><a:srgbClr val="000000"/></a:buClr><a:buSzPts val="1400"/><a:buFont typeface="Arial"/><a:buNone/></a:pPr><a:r><a:t></a:t></a:r><a:endParaRPr b="0" i="0" sz="1400" u="none" cap="none" strike="noStrike"><a:solidFill><a:srgbClr val="000000"/></a:solidFill><a:latin typeface="Arial"/><a:ea typeface="Arial"/><a:cs typeface="Arial"/><a:sym typeface="Arial"/></a:endParaRPr></a:p></p:txBody></p:sp><p:pic><p:nvPicPr><p:cNvPr id="104" name="Google Shape;104;p18"/><p:cNvPicPr preferRelativeResize="0"/><p:nvPr/></p:nvPicPr><p:blipFill rotWithShape="1"><a:blip r:embed="rId3"><a:alphaModFix/></a:blip><a:srcRect b="0" l="0" r="0" t="0"/><a:stretch/></p:blipFill><p:spPr><a:xfrm><a:off x="496925" y="482927"/><a:ext cx="576900" cy="385904"/></a:xfrm><a:prstGeom prst="rect"><a:avLst/></a:prstGeom><a:noFill/><a:ln><a:noFill/></a:ln></p:spPr></p:pic><p:sp><p:nvSpPr><p:cNvPr id="105" name="Google Shape;105;p18"/><p:cNvSpPr txBox="1"/><p:nvPr/></p:nvSpPr><p:spPr><a:xfrm><a:off x="3518399" y="329500"/><a:ext cx="5163600" cy="738900"/></a:xfrm><a:prstGeom prst="rect"><a:avLst/></a:prstGeom><a:noFill/><a:ln><a:noFill/></a:ln></p:spPr><p:txBody><a:bodyPr anchorCtr="0" anchor="t" bIns="91425" lIns="91425" spcFirstLastPara="1" rIns="91425" wrap="square" tIns="91425"><a:spAutoFit/></a:bodyPr><a:lstStyle/><a:p><a:pPr indent="0" lvl="0" marL="0" rtl="0" algn="l"><a:spcBef><a:spcPts val="0"/></a:spcBef><a:spcAft><a:spcPts val="0"/></a:spcAft><a:buNone/></a:pPr><a:r><a:rPr lang="fr" sz="1800"><a:solidFill><a:schemeClr val="dk2"/></a:solidFill></a:rPr><a:t>API publique des avis Steam</a:t></a:r><a:br><a:rPr lang="fr" sz="1800"><a:solidFill><a:schemeClr val="dk2"/></a:solidFill></a:rPr></a:br><a:r><a:rPr lang="fr" sz="1800"><a:solidFill><a:schemeClr val="dk2"/></a:solidFill></a:rPr><a:t>9 271 lignes brutes — 3 jeux, anglais et français</a:t></a:r><a:endParaRPr sz="1800"><a:solidFill><a:schemeClr val="dk2"/></a:solidFill></a:endParaRPr></a:p></p:txBody></p:sp><p:sp><p:nvSpPr><p:cNvPr id="106" name="Google Shape;106;p18"/><p:cNvSpPr/><p:nvPr/></p:nvSpPr><p:spPr><a:xfrm><a:off x="402939" y="1156461"/><a:ext cx="3615000" cy="193800"/></a:xfrm><a:prstGeom prst="rect"><a:avLst/></a:prstGeom><a:noFill/><a:ln><a:noFill/></a:ln></p:spPr><p:txBody><a:bodyPr anchorCtr="0" anchor="t" bIns="0" lIns="0" spcFirstLastPara="1" rIns="0" wrap="square" tIns="0"><a:noAutofit/></a:bodyPr><a:lstStyle/><a:p><a:pPr indent="0" lvl="0" marL="0" marR="0" rtl="0" algn="l"><a:lnSpc><a:spcPct val="125000"/></a:lnSpc><a:spcBef><a:spcPts val="0"/></a:spcBef><a:spcAft><a:spcPts val="0"/></a:spcAft><a:buClr><a:srgbClr val="0C0D0F"/></a:buClr><a:buSzPts val="1217"/><a:buFont typeface="Inter"/><a:buNone/></a:pPr><a:r><a:rPr lang="fr" sz="1217"><a:solidFill><a:srgbClr val="0C0D0F"/></a:solidFill><a:latin typeface="Inter"/><a:ea typeface="Inter"/><a:cs typeface="Inter"/><a:sym typeface="Inter"/></a:rPr><a:t>Traitement en 5 étapes, testé à chaque passage</a:t></a:r><a:endParaRPr b="0" i="0" sz="1217" u="none" cap="none" strike="noStrike"/></a:p></p:txBody></p:sp><p:sp><p:nvSpPr><p:cNvPr id="107" name="Google Shape;107;p18"/><p:cNvSpPr/><p:nvPr/></p:nvSpPr><p:spPr><a:xfrm><a:off x="402961" y="1448759"/><a:ext cx="1498200" cy="711900"/></a:xfrm><a:prstGeom prst="roundRect"><a:avLst><a:gd fmla="val 11687" name="adj"/></a:avLst></a:prstGeom><a:solidFill><a:srgbClr val="FFFFFF"/></a:solidFill><a:ln cap="flat" cmpd="sng" w="8125"><a:solidFill><a:srgbClr val="FF7047"/></a:solidFill><a:prstDash val="solid"/><a:round/><a:headEnd len="sm" w="sm" type="none"/><a:tailEnd len="sm" w="sm" type="none"/ xml:space="preserve"> 1. </a:t></a:r><a:r><a:rPr b="1" lang="fr" sz="1054"><a:solidFill><a:srgbClr val="55575A"/></a:solidFill><a:latin typeface="Manrope"/><a:ea typeface="Manrope"/><a:cs typeface="Manrope"/><a:sym typeface="Manrope"/></a:rPr><a:t>Zone brute inchangée</a:t></a:r><a:endParaRPr b="1" sz="1054"><a:solidFill><a:srgbClr val="55575A"/></a:solidFill><a:latin typeface="Manrope"/><a:ea typeface="Manrope"/><a:cs typeface="Manrope"/><a:sym typeface="Manrope"/></a:endParaRPr></a:p></p:txBody></p:sp><p:sp><p:nvSpPr><p:cNvPr id="108" name="Google Shape;108;p18"/><p:cNvSpPr/><p:nvPr/></p:nvSpPr><p:spPr><a:xfrm><a:off x="2194798" y="1438311"/><a:ext cx="1498200" cy="711900"/></a:xfrm><a:prstGeom prst="roundRect"><a:avLst><a:gd fmla="val 11687" name="adj"/></a:avLst></a:prstGeom><a:solidFill><a:srgbClr val="FFFFFF"/></a:solidFill><a:ln cap="flat" cmpd="sng" w="8125"><a:solidFill><a:srgbClr val="FF7047"/></a:solidFill><a:prstDash val="solid"/><a:round/><a:headEnd len="sm" w="sm" type="none"/><a:tailEnd len="sm" w="sm" type="none"/ xml:space="preserve">2. Dédoublonnage </a:t></a:r><a:br><a:rPr b="1" lang="fr" sz="1000"><a:solidFill><a:srgbClr val="55575A"/></a:solidFill><a:latin typeface="Manrope"/><a:ea typeface="Manrope"/><a:cs typeface="Manrope"/><a:sym typeface="Manrope"/></a:rPr></a:br><a:r><a:rPr b="1" lang="fr" sz="1000"><a:solidFill><a:srgbClr val="55575A"/></a:solidFill><a:latin typeface="Manrope"/><a:ea typeface="Manrope"/><a:cs typeface="Manrope"/><a:sym typeface="Manrope"/></a:rPr><a:t>et nettoyage du BBCode</a:t></a:r><a:endParaRPr b="1" sz="1000"><a:solidFill><a:srgbClr val="55575A"/></a:solidFill><a:latin typeface="Manrope"/><a:ea typeface="Manrope"/><a:cs typeface="Manrope"/><a:sym typeface="Manrope"/></a:endParaRPr></a:p></p:txBody></p:sp><p:sp><p:nvSpPr><p:cNvPr id="109" name="Google Shape;109;p18"/><p:cNvSpPr/><p:nvPr/></p:nvSpPr><p:spPr><a:xfrm><a:off x="3764412" y="1449638"/><a:ext cx="1498200" cy="711900"/></a:xfrm><a:prstGeom prst="roundRect"><a:avLst><a:gd fmla="val 11687" name="adj"/></a:avLst></a:prstGeom><a:solidFill><a:srgbClr val="FFFFFF"/></a:solidFill><a:ln cap="flat" cmpd="sng" w="8125"><a:solidFill><a:srgbClr val="FF7047"/></a:solidFill><a:prstDash val="solid"/><a:round/><a:headEnd len="sm" w="sm" type="none"/><a:tailEnd len="sm" w="sm" type="none"/>3. Pseudonymisation HMAC</a:t></a:r><a:endParaRPr b="1" sz="1200"><a:solidFill><a:srgbClr val="55575A"/></a:solidFill><a:latin typeface="Manrope"/><a:ea typeface="Manrope"/><a:cs typeface="Manrope"/><a:sym typeface="Manrope"/></a:endParaRPr></a:p></p:txBody></p:sp><p:sp><p:nvSpPr><p:cNvPr id="110" name="Google Shape;110;p18"/><p:cNvSpPr/><p:nvPr/></p:nvSpPr><p:spPr><a:xfrm><a:off x="5351099" y="1449650"/><a:ext cx="1498200" cy="711900"/></a:xfrm><a:prstGeom prst="roundRect"><a:avLst><a:gd fmla="val 11687" name="adj"/></a:avLst></a:prstGeom><a:solidFill><a:srgbClr val="FFFFFF"/></a:solidFill><a:ln cap="flat" cmpd="sng" w="8125"><a:solidFill><a:srgbClr val="FF7047"/></a:solidFill><a:prstDash val="solid"/><a:round/><a:headEnd len="sm" w="sm" type="none"/><a:tailEnd len="sm" w="sm" type="none"/>4. Contrôles bloquants</a:t></a:r><a:endParaRPr b="1" sz="1200"><a:solidFill><a:srgbClr val="55575A"/></a:solidFill><a:latin typeface="Manrope"/><a:ea typeface="Manrope"/><a:cs typeface="Manrope"/><a:sym typeface="Manrope"/></a:endParaRPr></a:p></p:txBody></p:sp><p:sp><p:nvSpPr><p:cNvPr id="111" name="Google Shape;111;p18"/><p:cNvSpPr/><p:nvPr/></p:nvSpPr><p:spPr><a:xfrm><a:off x="6937799" y="1460100"/><a:ext cx="1498200" cy="711900"/></a:xfrm><a:prstGeom prst="roundRect"><a:avLst><a:gd fmla="val 11687" name="adj"/></a:avLst></a:prstGeom><a:solidFill><a:srgbClr val="FFFFFF"/></a:solidFill><a:ln cap="flat" cmpd="sng" w="8125"><a:solidFill><a:srgbClr val="FF7047"/></a:solidFill><a:prstDash val="solid"/><a:round/><a:headEnd len="sm" w="sm" type="none"/><a:tailEnd len="sm" w="sm" type="none"/>5. Great Expectations</a:t></a:r><a:endParaRPr b="1" sz="1200"><a:solidFill><a:srgbClr val="55575A"/></a:solidFill><a:latin typeface="Manrope"/><a:ea typeface="Manrope"/><a:cs typeface="Manrope"/><a:sym typeface="Manrope"/></a:endParaRPr></a:p></p:txBody></p:sp><p:sp><p:nvSpPr><p:cNvPr id="112" name="Google Shape;112;p18"/><p:cNvSpPr txBox="1"/><p:nvPr/></p:nvSpPr><p:spPr><a:xfrm><a:off x="402950" y="2701550"/><a:ext cx="8033100" cy="1639200"/></a:xfrm><a:prstGeom prst="rect"><a:avLst/></a:prstGeom><a:noFill/><a:ln><a:noFill/></a:ln></p:spPr><p:txBody><a:bodyPr anchorCtr="0" anchor="t" bIns="91425" lIns="91425" spcFirstLastPara="1" rIns="91425" wrap="square" tIns="91425"><a:spAutoFit/></a:bodyPr><a:lstStyle/><a:p><a:pPr indent="0" lvl="0" marL="0" rtl="0" algn="l"><a:lnSpc><a:spcPct val="115000"/></a:lnSpc><a:spcBef><a:spcPts val="0"/></a:spcBef><a:spcAft><a:spcPts val="0"/></a:spcAft><a:buNone/></a:pPr><a:r><a:rPr b="1" lang="fr"><a:solidFill><a:srgbClr val="015955"/></a:solidFill><a:highlight><a:schemeClr val="lt1"/></a:highlight></a:rPr><a:t>Confidentialité :</a:t></a:r><a:r><a:rPr lang="fr"><a:solidFill><a:srgbClr val="27251E"/></a:solidFill><a:highlight><a:schemeClr val="lt1"/></a:highlight></a:rPr><a:t> </a:t></a:r><a:endParaRPr><a:solidFill><a:srgbClr val="27251E"/></a:solidFill><a:highlight><a:schemeClr val="lt1"/></a:highlight></a:endParaRPr></a:p><a:p><a:pPr indent="-317500" lvl="0" marL="457200" rtl="0" algn="l"><a:lnSpc><a:spcPct val="115000"/></a:lnSpc><a:spcBef><a:spcPts val="0"/></a:spcBef><a:spcAft><a:spcPts val="0"/></a:spcAft><a:buClr><a:schemeClr val="dk2"/></a:buClr><a:buSzPts val="1400"/><a:buChar char="●"/></a:pPr><a:r><a:rPr lang="fr"><a:solidFill><a:schemeClr val="dk2"/></a:solidFill><a:highlight><a:schemeClr val="lt1"/></a:highlight></a:rPr><a:t>steamid</a:t></a:r><a:r><a:rPr lang="fr"><a:solidFill><a:schemeClr val="dk2"/></a:solidFill></a:rPr><a:t xml:space="preserve"> </a:t></a:r><a:r><a:rPr b="1" lang="fr"><a:solidFill><a:schemeClr val="dk2"/></a:solidFill></a:rPr><a:t>→ pseudonymisé (HMAC salé)</a:t></a:r><a:endParaRPr b="1"><a:solidFill><a:schemeClr val="dk2"/></a:solidFill></a:endParaRPr></a:p><a:p><a:pPr indent="-317500" lvl="0" marL="457200" rtl="0" algn="l"><a:lnSpc><a:spcPct val="115000"/></a:lnSpc><a:spcBef><a:spcPts val="0"/></a:spcBef><a:spcAft><a:spcPts val="0"/></a:spcAft><a:buClr><a:schemeClr val="dk2"/></a:buClr><a:buSzPts val="1400"/><a:buChar char="●"/></a:pPr><a:r><a:rPr lang="fr"><a:solidFill><a:schemeClr val="dk2"/></a:solidFill><a:highlight><a:schemeClr val="lt1"/></a:highlight></a:rPr><a:t>personaname, profile_url, avatar : identifiants directs</a:t></a:r><a:r><a:rPr lang="fr"><a:solidFill><a:schemeClr val="dk2"/></a:solidFill></a:rPr><a:t xml:space="preserve"> → </a:t></a:r><a:r><a:rPr b="1" lang="fr"><a:solidFill><a:schemeClr val="dk2"/></a:solidFill></a:rPr><a:t xml:space="preserve">supprimés dès la zone propre </a:t></a:r><a:endParaRPr b="1"><a:solidFill><a:schemeClr val="dk2"/></a:solidFill></a:endParaRPr></a:p><a:p><a:pPr indent="-317500" lvl="0" marL="457200" rtl="0" algn="l"><a:lnSpc><a:spcPct val="115000"/></a:lnSpc><a:spcBef><a:spcPts val="0"/></a:spcBef><a:spcAft><a:spcPts val="0"/></a:spcAft><a:buClr><a:schemeClr val="dk2"/></a:buClr><a:buSzPts val="1400"/><a:buChar char="●"/></a:pPr><a:r><a:rPr lang="fr"><a:solidFill><a:schemeClr val="dk2"/></a:solidFill><a:highlight><a:schemeClr val="lt1"/></a:highlight></a:rPr><a:t>Flux complémentaire</a:t></a:r><a:r><a:rPr lang="fr"><a:solidFill><a:schemeClr val="dk2"/></a:solidFill></a:rPr><a:t xml:space="preserve"> d'avis négatifs </a:t></a:r><a:r><a:rPr b="1" lang="fr"><a:solidFill><a:schemeClr val="dk2"/></a:solidFill></a:rPr><a:t>→ entraînement seulement</a:t></a:r><a:endParaRPr b="1"><a:solidFill><a:schemeClr val="dk2"/></a:solidFill></a:endParaRPr></a:p><a:p><a:pPr indent="-317500" lvl="0" marL="457200" rtl="0" algn="l"><a:lnSpc><a:spcPct val="115000"/></a:lnSpc><a:spcBef><a:spcPts val="0"/></a:spcBef><a:spcAft><a:spcPts val="0"/></a:spcAft><a:buClr><a:schemeClr val="dk2"/></a:buClr><a:buSzPts val="1400"/><a:buChar char="●"/></a:pPr><a:r><a:rPr lang="fr"><a:solidFill><a:schemeClr val="dk2"/></a:solidFill></a:rPr><a:t xml:space="preserve">Idempotence : un second passage n'écrit aucun doublon </a:t></a:r><a:r><a:rPr b="1" lang="fr"><a:solidFill><a:schemeClr val="dk2"/></a:solidFill></a:rPr><a:t>(manifeste)</a:t></a:r><a:endParaRPr><a:solidFill><a:schemeClr val="dk2"/></a:solidFill></a:endParaRPr></a:p><a:p><a:pPr indent="-317500" lvl="0" marL="457200" rtl="0" algn="l"><a:lnSpc><a:spcPct val="115000"/></a:lnSpc><a:spcBef><a:spcPts val="0"/></a:spcBef><a:spcAft><a:spcPts val="0"/></a:spcAft><a:buClr><a:schemeClr val="dk2"/></a:buClr><a:buSzPts val="1400"/><a:buChar char="●"/></a:pPr><a:r><a:rPr lang="fr"><a:solidFill><a:schemeClr val="dk2"/></a:solidFill></a:rPr><a:t xml:space="preserve">Zone silver Iceberg </a:t></a:r><a:r><a:rPr b="1" lang="fr"><a:solidFill><a:schemeClr val="dk2"/></a:solidFill></a:rPr><a:t xml:space="preserve">→ 19 instantanés versionnés </a:t></a:r><a:r><a:rPr lang="fr"><a:solidFill><a:schemeClr val="dk2"/></a:solidFill></a:rPr><a:t></a:t></a:r><a:endParaRPr sz="1800"><a:solidFill><a:schemeClr val="dk2"/></a:solidFill></a:endParaRPr></a:p></p:txBody></p:sp></p:spTree></p:cSld><p:clrMapOvr><a:masterClrMapping/></p:clrMapOvr></p:sld>
 </file>
 
 <file path=ppt/theme/theme1.xml><?xml version="1.0" encoding="utf-8"?>

--- a/docs/presentation/ReviewPulse_DemoDay.pptx
+++ b/docs/presentation/ReviewPulse_DemoDay.pptx
@@ -8265,7 +8265,7 @@
                   <a:srgbClr val="FFFFFF"/>
                 </a:highlight>
               </a:rPr>
-              <a:t xml:space="preserve">(0,759 puis 0,797) </a:t>
+              <a:t xml:space="preserve">(0,759 puis 0,797 puis 0,803) </a:t>
             </a:r>
             <a:r>
               <a:rPr b="1" lang="fr" sz="1200">
@@ -8855,7 +8855,7 @@
                   <a:schemeClr val="dk2"/>
                 </a:solidFill>
               </a:rPr>
-              <a:t>0,797</a:t>
+              <a:t>0,803</a:t>
             </a:r>
             <a:r>
               <a:rPr lang="fr" sz="2400">
@@ -8902,7 +8902,7 @@
                   <a:schemeClr val="dk2"/>
                 </a:solidFill>
               </a:rPr>
-              <a:t>0,931</a:t>
+              <a:t>0,940</a:t>
             </a:r>
             <a:r>
               <a:rPr lang="fr" sz="2400">
@@ -8949,7 +8949,7 @@
                   <a:schemeClr val="dk2"/>
                 </a:solidFill>
               </a:rPr>
-              <a:t>125 verts</a:t>
+              <a:t>131 verts</a:t>
             </a:r>
             <a:r>
               <a:rPr lang="fr" sz="2400">
@@ -8957,7 +8957,7 @@
                   <a:schemeClr val="dk2"/>
                 </a:solidFill>
               </a:rPr>
-              <a:t xml:space="preserve"> ; 26 mutations sur 26 détectées</a:t>
+              <a:t xml:space="preserve"> ; 26 mutations sur 26 détectées, en deux passages</a:t>
             </a:r>
             <a:endParaRPr sz="2400">
               <a:solidFill>

--- a/docs/presentation/ReviewPulse_DemoDay.pptx
+++ b/docs/presentation/ReviewPulse_DemoDay.pptx
@@ -9414,7 +9414,7 @@
                   <a:srgbClr val="FFFFFF"/>
                 </a:highlight>
               </a:rPr>
-              <a:t>Test de la stack déployée : 16 contrôles sur 16</a:t>
+              <a:t>Test de la stack déployée : 16 contrôles sur 16 · Essai de charge : 300 requêtes, 0 % d'erreur, 29,3 req/s, p99 925 ms</a:t>
             </a:r>
             <a:endParaRPr sz="1300">
               <a:solidFill>
@@ -9599,7 +9599,7 @@
                   <a:srgbClr val="FFFFFF"/>
                 </a:highlight>
               </a:rPr>
-              <a:t>Essai de charge de l'API : le référentiel demande l'orchestration sous charge</a:t>
+              <a:t>Mesure de biais par langue et par jeu : l'AI Act la demande, nous ne l'avons pas — ADR 0021</a:t>
             </a:r>
             <a:endParaRPr sz="1300">
               <a:solidFill>
@@ -9746,7 +9746,7 @@
                   <a:srgbClr val="FFFFFF"/>
                 </a:highlight>
               </a:rPr>
-              <a:t>Socle réemployable pour les blocs AIA et CDSD — 20 décisions écrites, ADR 0001 à 0020</a:t>
+              <a:t>Socle de briques réemployables — 29 décisions écrites, ADR 0001 à 0029. Chaque bloc garde son projet imposé : ce sont les briques qui circulent, pas le projet</a:t>
             </a:r>
             <a:endParaRPr sz="1300">
               <a:solidFill>

--- a/docs/presentation/ReviewPulse_DemoDay.pptx
+++ b/docs/presentation/ReviewPulse_DemoDay.pptx
@@ -7909,7 +7909,7 @@
 </file>
 
 <file path=ppt/slides/slide13.xml><?xml version="1.0" encoding="UTF-8" standalone="yes"?>-<p:sld xmlns:a="http://schemas.openxmlformats.org/drawingml/2006/main" xmlns:r="http://schemas.openxmlformats.org/officeDocument/2006/relationships" xmlns:mc="http://schemas.openxmlformats.org/markup-compatibility/2006" xmlns:mv="urn:schemas-microsoft-com:mac:vml" xmlns:p="http://schemas.openxmlformats.org/presentationml/2006/main" xmlns:c="http://schemas.openxmlformats.org/drawingml/2006/chart" xmlns:dgm="http://schemas.openxmlformats.org/drawingml/2006/diagram" xmlns:o="urn:schemas-microsoft-com:office:office" xmlns:v="urn:schemas-microsoft-com:vml" xmlns:pvml="urn:schemas-microsoft-com:office:powerpoint" xmlns:com="http://schemas.openxmlformats.org/drawingml/2006/compatibility" xmlns:p14="http://schemas.microsoft.com/office/powerpoint/2010/main" xmlns:p15="http://schemas.microsoft.com/office/powerpoint/2012/main" xmlns:ahyp="http://schemas.microsoft.com/office/drawing/2018/hyperlinkcolor"><p:cSld><p:spTree><p:nvGrpSpPr><p:cNvPr id="178" name="Shape 178"/><p:cNvGrpSpPr/><p:nvPr/></p:nvGrpSpPr><p:grpSpPr><a:xfrm><a:off x="0" y="0"/><a:ext cx="0" cy="0"/><a:chOff x="0" y="0"/><a:chExt cx="0" cy="0"/></a:xfrm></p:grpSpPr><p:sp><p:nvSpPr><p:cNvPr id="179" name="Google Shape;179;p25"/><p:cNvSpPr txBox="1"/><p:nvPr><p:ph idx="4294967295" type="ctrTitle"/></p:nvPr></p:nvSpPr><p:spPr><a:xfrm><a:off x="1192664" y="403309"/><a:ext cx="5315100" cy="533100"/></a:xfrm><a:prstGeom prst="rect"><a:avLst/></a:prstGeom><a:noFill/><a:ln><a:noFill/></a:ln></p:spPr><p:txBody><a:bodyPr anchorCtr="0" anchor="t" bIns="91425" lIns="91425" spcFirstLastPara="1" rIns="91425" wrap="square" tIns="91425"><a:noAutofit/></a:bodyPr><a:lstStyle/><a:p><a:pPr indent="0" lvl="0" marL="0" marR="0" rtl="0" algn="l"><a:lnSpc><a:spcPct val="100000"/></a:lnSpc><a:spcBef><a:spcPts val="0"/></a:spcBef><a:spcAft><a:spcPts val="0"/></a:spcAft><a:buClr><a:schemeClr val="dk1"/></a:buClr><a:buSzPts val="2800"/><a:buFont typeface="Arial"/><a:buNone/></a:pPr><a:r><a:rPr lang="fr" sz="2500"><a:solidFill><a:srgbClr val="0E3449"/></a:solidFill><a:latin typeface="Inter SemiBold"/><a:ea typeface="Inter SemiBold"/><a:cs typeface="Inter SemiBold"/><a:sym typeface="Inter SemiBold"/></a:rPr><a:t>La chaîne de bout en bout</a:t></a:r><a:endParaRPr i="0" sz="2500" u="none" cap="none" strike="noStrike"><a:solidFill><a:srgbClr val="0E3449"/></a:solidFill><a:latin typeface="Inter SemiBold"/><a:ea typeface="Inter SemiBold"/><a:cs typeface="Inter SemiBold"/><a:sym typeface="Inter SemiBold"/></a:endParaRPr></a:p></p:txBody></p:sp><p:sp><p:nvSpPr><p:cNvPr id="180" name="Google Shape;180;p25"/><p:cNvSpPr/><p:nvPr/></p:nvSpPr><p:spPr><a:xfrm><a:off x="10225" y="4892025"/><a:ext cx="9144000" cy="251400"/></a:xfrm><a:prstGeom prst="rect"><a:avLst/></a:prstGeom><a:solidFill><a:srgbClr val="C3FFFC"/></a:solidFill><a:ln><a:noFill/></a:ln></p:spPr><p:txBody><a:bodyPr anchorCtr="0" anchor="ctr" bIns="91425" lIns="91425" spcFirstLastPara="1" rIns="91425" wrap="square" tIns="91425"><a:noAutofit/></a:bodyPr><a:lstStyle/><a:p><a:pPr indent="0" lvl="0" marL="0" marR="0" rtl="0" algn="l"><a:lnSpc><a:spcPct val="100000"/></a:lnSpc><a:spcBef><a:spcPts val="0"/></a:spcBef><a:spcAft><a:spcPts val="0"/></a:spcAft><a:buClr><a:srgbClr val="000000"/></a:buClr><a:buSzPts val="1400"/><a:buFont typeface="Arial"/><a:buNone/></a:pPr><a:r><a:t></a:t></a:r><a:endParaRPr b="0" i="0" sz="1400" u="none" cap="none" strike="noStrike"><a:solidFill><a:srgbClr val="000000"/></a:solidFill><a:latin typeface="Arial"/><a:ea typeface="Arial"/><a:cs typeface="Arial"/><a:sym typeface="Arial"/></a:endParaRPr></a:p></p:txBody></p:sp><p:pic><p:nvPicPr><p:cNvPr id="181" name="Google Shape;181;p25"/><p:cNvPicPr preferRelativeResize="0"/><p:nvPr/></p:nvPicPr><p:blipFill rotWithShape="1"><a:blip r:embed="rId3"><a:alphaModFix/></a:blip><a:srcRect b="0" l="0" r="0" t="0"/><a:stretch/></p:blipFill><p:spPr><a:xfrm><a:off x="463375" y="482852"/><a:ext cx="576900" cy="385904"/></a:xfrm><a:prstGeom prst="rect"><a:avLst/></a:prstGeom><a:noFill/><a:ln><a:noFill/></a:ln></p:spPr></p:pic><p:sp><p:nvSpPr><p:cNvPr id="182" name="Google Shape;182;p25"/><p:cNvSpPr txBox="1"/><p:nvPr/></p:nvSpPr><p:spPr><a:xfrm><a:off x="1261450" y="1017575"/><a:ext cx="1902900" cy="461700"/></a:xfrm><a:prstGeom prst="rect"><a:avLst/></a:prstGeom><a:noFill/><a:ln><a:noFill/></a:ln></p:spPr><p:txBody><a:bodyPr anchorCtr="0" anchor="t" bIns="91425" lIns="91425" spcFirstLastPara="1" rIns="91425" wrap="square" tIns="91425"><a:spAutoFit/></a:bodyPr><a:lstStyle/><a:p><a:pPr indent="0" lvl="0" marL="0" rtl="0" algn="l"><a:spcBef><a:spcPts val="0"/></a:spcBef><a:spcAft><a:spcPts val="0"/></a:spcAft><a:buNone/></a:pPr><a:r><a:rPr lang="fr" sz="1800"><a:solidFill><a:schemeClr val="dk2"/></a:solidFill></a:rPr><a:t>Six étapes, une seule chaîne</a:t></a:r><a:endParaRPr sz="1800"><a:solidFill><a:schemeClr val="dk2"/></a:solidFill></a:endParaRPr></a:p></p:txBody></p:sp><p:sp><p:nvSpPr><p:cNvPr id="183" name="Google Shape;183;p25"/><p:cNvSpPr/><p:nvPr/></p:nvSpPr><p:spPr><a:xfrm><a:off x="650300" y="1861675"/><a:ext cx="2382600" cy="1248600"/></a:xfrm><a:prstGeom prst="roundRect"><a:avLst><a:gd fmla="val 11687" name="adj"/></a:avLst></a:prstGeom><a:solidFill><a:srgbClr val="FFFFFF"/></a:solidFill><a:ln cap="flat" cmpd="sng" w="9525"><a:solidFill><a:srgbClr val="FF7047"/></a:solidFill><a:prstDash val="solid"/><a:round/><a:headEnd len="sm" w="sm" type="none"/><a:tailEnd len="sm" w="sm" type="none"/>Ingestion idempotente depuis l'API Steam</a:t></a:r><a:endParaRPr/></a:p></p:txBody></p:sp><p:sp><p:nvSpPr><p:cNvPr id="184" name="Google Shape;184;p25"/><p:cNvSpPr/><p:nvPr/></p:nvSpPr><p:spPr><a:xfrm><a:off x="3264775" y="1861675"/><a:ext cx="1856100" cy="1248600"/></a:xfrm><a:prstGeom prst="roundRect"><a:avLst><a:gd fmla="val 11687" name="adj"/></a:avLst></a:prstGeom><a:solidFill><a:srgbClr val="FFFFFF"/></a:solidFill><a:ln cap="flat" cmpd="sng" w="9525"><a:solidFill><a:srgbClr val="FF7047"/></a:solidFill><a:prstDash val="solid"/><a:round/><a:headEnd len="sm" w="sm" type="none"/><a:tailEnd len="sm" w="sm" type="none"/ xml:space="preserve">Zone silver : </a:t></a:r><a:r><a:rPr lang="fr" sz="1650"><a:solidFill><a:srgbClr val="55575A"/></a:solidFill><a:latin typeface="Manrope"/><a:ea typeface="Manrope"/><a:cs typeface="Manrope"/><a:sym typeface="Manrope"/></a:rPr><a:t>PySpark et Iceberg</a:t></a:r><a:endParaRPr/></a:p></p:txBody></p:sp><p:sp><p:nvSpPr><p:cNvPr id="185" name="Google Shape;185;p25"/><p:cNvSpPr/><p:nvPr/></p:nvSpPr><p:spPr><a:xfrm><a:off x="5352750" y="1861675"/><a:ext cx="2877300" cy="1248600"/></a:xfrm><a:prstGeom prst="roundRect"><a:avLst><a:gd fmla="val 11687" name="adj"/></a:avLst></a:prstGeom><a:solidFill><a:srgbClr val="FFFFFF"/></a:solidFill><a:ln cap="flat" cmpd="sng" w="9525"><a:solidFill><a:srgbClr val="FF7047"/></a:solidFill><a:prstDash val="solid"/><a:round/><a:headEnd len="sm" w="sm" type="none"/><a:tailEnd len="sm" w="sm" type="none"/ xml:space="preserve">Zone gold : </a:t></a:r><a:br><a:rPr b="1" lang="fr" sz="1650"><a:solidFill><a:srgbClr val="55575A"/></a:solidFill><a:latin typeface="Manrope"/><a:ea typeface="Manrope"/><a:cs typeface="Manrope"/><a:sym typeface="Manrope"/></a:rPr></a:br><a:r><a:rPr lang="fr" sz="1650"><a:solidFill><a:srgbClr val="55575A"/></a:solidFill><a:latin typeface="Manrope"/><a:ea typeface="Manrope"/><a:cs typeface="Manrope"/><a:sym typeface="Manrope"/></a:rPr><a:t>dbt et DuckDB, 43 tests verts — ADR 0013, 0014</a:t></a:r><a:endParaRPr/></a:p></p:txBody></p:sp></p:spTree></p:cSld><p:clrMapOvr><a:masterClrMapping/></p:clrMapOvr></p:sld>
+<p:sld xmlns:a="http://schemas.openxmlformats.org/drawingml/2006/main" xmlns:r="http://schemas.openxmlformats.org/officeDocument/2006/relationships" xmlns:mc="http://schemas.openxmlformats.org/markup-compatibility/2006" xmlns:mv="urn:schemas-microsoft-com:mac:vml" xmlns:p="http://schemas.openxmlformats.org/presentationml/2006/main" xmlns:c="http://schemas.openxmlformats.org/drawingml/2006/chart" xmlns:dgm="http://schemas.openxmlformats.org/drawingml/2006/diagram" xmlns:o="urn:schemas-microsoft-com:office:office" xmlns:v="urn:schemas-microsoft-com:vml" xmlns:pvml="urn:schemas-microsoft-com:office:powerpoint" xmlns:com="http://schemas.openxmlformats.org/drawingml/2006/compatibility" xmlns:p14="http://schemas.microsoft.com/office/powerpoint/2010/main" xmlns:p15="http://schemas.microsoft.com/office/powerpoint/2012/main" xmlns:ahyp="http://schemas.microsoft.com/office/drawing/2018/hyperlinkcolor"><p:cSld><p:spTree><p:nvGrpSpPr><p:cNvPr id="178" name="Shape 178"/><p:cNvGrpSpPr/><p:nvPr/></p:nvGrpSpPr><p:grpSpPr><a:xfrm><a:off x="0" y="0"/><a:ext cx="0" cy="0"/><a:chOff x="0" y="0"/><a:chExt cx="0" cy="0"/></a:xfrm></p:grpSpPr><p:sp><p:nvSpPr><p:cNvPr id="179" name="Google Shape;179;p25"/><p:cNvSpPr txBox="1"/><p:nvPr><p:ph idx="4294967295" type="ctrTitle"/></p:nvPr></p:nvSpPr><p:spPr><a:xfrm><a:off x="1192664" y="403309"/><a:ext cx="5315100" cy="533100"/></a:xfrm><a:prstGeom prst="rect"><a:avLst/></a:prstGeom><a:noFill/><a:ln><a:noFill/></a:ln></p:spPr><p:txBody><a:bodyPr anchorCtr="0" anchor="t" bIns="91425" lIns="91425" spcFirstLastPara="1" rIns="91425" wrap="square" tIns="91425"><a:noAutofit/></a:bodyPr><a:lstStyle/><a:p><a:pPr indent="0" lvl="0" marL="0" marR="0" rtl="0" algn="l"><a:lnSpc><a:spcPct val="100000"/></a:lnSpc><a:spcBef><a:spcPts val="0"/></a:spcBef><a:spcAft><a:spcPts val="0"/></a:spcAft><a:buClr><a:schemeClr val="dk1"/></a:buClr><a:buSzPts val="2800"/><a:buFont typeface="Arial"/><a:buNone/></a:pPr><a:r><a:rPr lang="fr" sz="2500"><a:solidFill><a:srgbClr val="0E3449"/></a:solidFill><a:latin typeface="Inter SemiBold"/><a:ea typeface="Inter SemiBold"/><a:cs typeface="Inter SemiBold"/><a:sym typeface="Inter SemiBold"/></a:rPr><a:t>La chaîne de bout en bout</a:t></a:r><a:endParaRPr i="0" sz="2500" u="none" cap="none" strike="noStrike"><a:solidFill><a:srgbClr val="0E3449"/></a:solidFill><a:latin typeface="Inter SemiBold"/><a:ea typeface="Inter SemiBold"/><a:cs typeface="Inter SemiBold"/><a:sym typeface="Inter SemiBold"/></a:endParaRPr></a:p></p:txBody></p:sp><p:sp><p:nvSpPr><p:cNvPr id="180" name="Google Shape;180;p25"/><p:cNvSpPr/><p:nvPr/></p:nvSpPr><p:spPr><a:xfrm><a:off x="10225" y="4892025"/><a:ext cx="9144000" cy="251400"/></a:xfrm><a:prstGeom prst="rect"><a:avLst/></a:prstGeom><a:solidFill><a:srgbClr val="C3FFFC"/></a:solidFill><a:ln><a:noFill/></a:ln></p:spPr><p:txBody><a:bodyPr anchorCtr="0" anchor="ctr" bIns="91425" lIns="91425" spcFirstLastPara="1" rIns="91425" wrap="square" tIns="91425"><a:noAutofit/></a:bodyPr><a:lstStyle/><a:p><a:pPr indent="0" lvl="0" marL="0" marR="0" rtl="0" algn="l"><a:lnSpc><a:spcPct val="100000"/></a:lnSpc><a:spcBef><a:spcPts val="0"/></a:spcBef><a:spcAft><a:spcPts val="0"/></a:spcAft><a:buClr><a:srgbClr val="000000"/></a:buClr><a:buSzPts val="1400"/><a:buFont typeface="Arial"/><a:buNone/></a:pPr><a:r><a:t></a:t></a:r><a:endParaRPr b="0" i="0" sz="1400" u="none" cap="none" strike="noStrike"><a:solidFill><a:srgbClr val="000000"/></a:solidFill><a:latin typeface="Arial"/><a:ea typeface="Arial"/><a:cs typeface="Arial"/><a:sym typeface="Arial"/></a:endParaRPr></a:p></p:txBody></p:sp><p:pic><p:nvPicPr><p:cNvPr id="181" name="Google Shape;181;p25"/><p:cNvPicPr preferRelativeResize="0"/><p:nvPr/></p:nvPicPr><p:blipFill rotWithShape="1"><a:blip r:embed="rId3"><a:alphaModFix/></a:blip><a:srcRect b="0" l="0" r="0" t="0"/><a:stretch/></p:blipFill><p:spPr><a:xfrm><a:off x="463375" y="482852"/><a:ext cx="576900" cy="385904"/></a:xfrm><a:prstGeom prst="rect"><a:avLst/></a:prstGeom><a:noFill/><a:ln><a:noFill/></a:ln></p:spPr></p:pic><p:sp><p:nvSpPr><p:cNvPr id="182" name="Google Shape;182;p25"/><p:cNvSpPr txBox="1"/><p:nvPr/></p:nvSpPr><p:spPr><a:xfrm><a:off x="1261450" y="1017575"/><a:ext cx="1902900" cy="461700"/></a:xfrm><a:prstGeom prst="rect"><a:avLst/></a:prstGeom><a:noFill/><a:ln><a:noFill/></a:ln></p:spPr><p:txBody><a:bodyPr anchorCtr="0" anchor="t" bIns="91425" lIns="91425" spcFirstLastPara="1" rIns="91425" wrap="square" tIns="91425"><a:spAutoFit/></a:bodyPr><a:lstStyle/><a:p><a:pPr indent="0" lvl="0" marL="0" rtl="0" algn="l"><a:spcBef><a:spcPts val="0"/></a:spcBef><a:spcAft><a:spcPts val="0"/></a:spcAft><a:buNone/></a:pPr><a:r><a:rPr lang="fr" sz="1800"><a:solidFill><a:schemeClr val="dk2"/></a:solidFill></a:rPr><a:t>Six étapes, une seule chaîne</a:t></a:r><a:endParaRPr sz="1800"><a:solidFill><a:schemeClr val="dk2"/></a:solidFill></a:endParaRPr></a:p></p:txBody></p:sp><p:sp><p:nvSpPr><p:cNvPr id="183" name="Google Shape;183;p25"/><p:cNvSpPr/><p:nvPr/></p:nvSpPr><p:spPr><a:xfrm><a:off x="650300" y="1861675"/><a:ext cx="2382600" cy="1248600"/></a:xfrm><a:prstGeom prst="roundRect"><a:avLst><a:gd fmla="val 11687" name="adj"/></a:avLst></a:prstGeom><a:solidFill><a:srgbClr val="FFFFFF"/></a:solidFill><a:ln cap="flat" cmpd="sng" w="9525"><a:solidFill><a:srgbClr val="FF7047"/></a:solidFill><a:prstDash val="solid"/><a:round/><a:headEnd len="sm" w="sm" type="none"/><a:tailEnd len="sm" w="sm" type="none"/>Ingestion idempotente depuis l'API Steam</a:t></a:r><a:endParaRPr/></a:p></p:txBody></p:sp><p:sp><p:nvSpPr><p:cNvPr id="184" name="Google Shape;184;p25"/><p:cNvSpPr/><p:nvPr/></p:nvSpPr><p:spPr><a:xfrm><a:off x="3264775" y="1861675"/><a:ext cx="1856100" cy="1248600"/></a:xfrm><a:prstGeom prst="roundRect"><a:avLst><a:gd fmla="val 11687" name="adj"/></a:avLst></a:prstGeom><a:solidFill><a:srgbClr val="FFFFFF"/></a:solidFill><a:ln cap="flat" cmpd="sng" w="9525"><a:solidFill><a:srgbClr val="FF7047"/></a:solidFill><a:prstDash val="solid"/><a:round/><a:headEnd len="sm" w="sm" type="none"/><a:tailEnd len="sm" w="sm" type="none"/ xml:space="preserve">Zone silver : </a:t></a:r><a:r><a:rPr lang="fr" sz="1650"><a:solidFill><a:srgbClr val="55575A"/></a:solidFill><a:latin typeface="Manrope"/><a:ea typeface="Manrope"/><a:cs typeface="Manrope"/><a:sym typeface="Manrope"/></a:rPr><a:t>PySpark et Iceberg</a:t></a:r><a:endParaRPr/></a:p></p:txBody></p:sp><p:sp><p:nvSpPr><p:cNvPr id="185" name="Google Shape;185;p25"/><p:cNvSpPr/><p:nvPr/></p:nvSpPr><p:spPr><a:xfrm><a:off x="5352750" y="1861675"/><a:ext cx="2877300" cy="1248600"/></a:xfrm><a:prstGeom prst="roundRect"><a:avLst><a:gd fmla="val 11687" name="adj"/></a:avLst></a:prstGeom><a:solidFill><a:srgbClr val="FFFFFF"/></a:solidFill><a:ln cap="flat" cmpd="sng" w="9525"><a:solidFill><a:srgbClr val="FF7047"/></a:solidFill><a:prstDash val="solid"/><a:round/><a:headEnd len="sm" w="sm" type="none"/><a:tailEnd len="sm" w="sm" type="none"/ xml:space="preserve">Zone gold : </a:t></a:r><a:br><a:rPr b="1" lang="fr" sz="1650"><a:solidFill><a:srgbClr val="55575A"/></a:solidFill><a:latin typeface="Manrope"/><a:ea typeface="Manrope"/><a:cs typeface="Manrope"/><a:sym typeface="Manrope"/></a:rPr></a:br><a:r><a:rPr lang="fr" sz="1650"><a:solidFill><a:srgbClr val="55575A"/></a:solidFill><a:latin typeface="Manrope"/><a:ea typeface="Manrope"/><a:cs typeface="Manrope"/><a:sym typeface="Manrope"/></a:rPr><a:t>dbt et DuckDB, 30 tests déclarés dans les contrats — ADR 0013, 0014</a:t></a:r><a:endParaRPr/></a:p></p:txBody></p:sp></p:spTree></p:cSld><p:clrMapOvr><a:masterClrMapping/></p:clrMapOvr></p:sld>
 </file>
 
 <file path=ppt/slides/slide14.xml><?xml version="1.0" encoding="utf-8"?>
@@ -8910,7 +8910,7 @@
                   <a:schemeClr val="dk2"/>
                 </a:solidFill>
               </a:rPr>
-              <a:t xml:space="preserve"> ; rappel des négatifs 0,634</a:t>
+              <a:t xml:space="preserve"> ; rappel des négatifs 0,650</a:t>
             </a:r>
             <a:endParaRPr sz="2400">
               <a:solidFill>
@@ -8957,7 +8957,7 @@
                   <a:schemeClr val="dk2"/>
                 </a:solidFill>
               </a:rPr>
-              <a:t xml:space="preserve"> ; 26 mutations sur 26 détectées, en deux passages</a:t>
+              <a:t xml:space="preserve"> ; 27 mutations sur 27 détectées, en un seul passage en intégration continue</a:t>
             </a:r>
             <a:endParaRPr sz="2400">
               <a:solidFill>
@@ -10639,7 +10639,7 @@
 </file>
 
 <file path=ppt/slides/slide6.xml><?xml version="1.0" encoding="UTF-8" standalone="yes"?>-<p:sld xmlns:a="http://schemas.openxmlformats.org/drawingml/2006/main" xmlns:r="http://schemas.openxmlformats.org/officeDocument/2006/relationships" xmlns:mc="http://schemas.openxmlformats.org/markup-compatibility/2006" xmlns:mv="urn:schemas-microsoft-com:mac:vml" xmlns:p="http://schemas.openxmlformats.org/presentationml/2006/main" xmlns:c="http://schemas.openxmlformats.org/drawingml/2006/chart" xmlns:dgm="http://schemas.openxmlformats.org/drawingml/2006/diagram" xmlns:o="urn:schemas-microsoft-com:office:office" xmlns:v="urn:schemas-microsoft-com:vml" xmlns:pvml="urn:schemas-microsoft-com:office:powerpoint" xmlns:com="http://schemas.openxmlformats.org/drawingml/2006/compatibility" xmlns:p14="http://schemas.microsoft.com/office/powerpoint/2010/main" xmlns:p15="http://schemas.microsoft.com/office/powerpoint/2012/main" xmlns:ahyp="http://schemas.microsoft.com/office/drawing/2018/hyperlinkcolor"><p:cSld><p:spTree><p:nvGrpSpPr><p:cNvPr id="101" name="Shape 101"/><p:cNvGrpSpPr/><p:nvPr/></p:nvGrpSpPr><p:grpSpPr><a:xfrm><a:off x="0" y="0"/><a:ext cx="0" cy="0"/><a:chOff x="0" y="0"/><a:chExt cx="0" cy="0"/></a:xfrm></p:grpSpPr><p:sp><p:nvSpPr><p:cNvPr id="102" name="Google Shape;102;p18"/><p:cNvSpPr txBox="1"/><p:nvPr><p:ph idx="4294967295" type="ctrTitle"/></p:nvPr></p:nvSpPr><p:spPr><a:xfrm><a:off x="1073814" y="409334"/><a:ext cx="5315100" cy="533100"/></a:xfrm><a:prstGeom prst="rect"><a:avLst/></a:prstGeom><a:noFill/><a:ln><a:noFill/></a:ln></p:spPr><p:txBody><a:bodyPr anchorCtr="0" anchor="t" bIns="91425" lIns="91425" spcFirstLastPara="1" rIns="91425" wrap="square" tIns="91425"><a:noAutofit/></a:bodyPr><a:lstStyle/><a:p><a:pPr indent="0" lvl="0" marL="0" marR="0" rtl="0" algn="l"><a:lnSpc><a:spcPct val="100000"/></a:lnSpc><a:spcBef><a:spcPts val="0"/></a:spcBef><a:spcAft><a:spcPts val="0"/></a:spcAft><a:buNone/></a:pPr><a:r><a:rPr lang="fr" sz="2500"><a:solidFill><a:srgbClr val="0E3449"/></a:solidFill><a:latin typeface="Inter SemiBold"/><a:ea typeface="Inter SemiBold"/><a:cs typeface="Inter SemiBold"/><a:sym typeface="Inter SemiBold"/></a:rPr><a:t>2.   Les données</a:t></a:r><a:endParaRPr i="0" sz="2500" u="none" cap="none" strike="noStrike"><a:solidFill><a:srgbClr val="0E3449"/></a:solidFill><a:latin typeface="Inter SemiBold"/><a:ea typeface="Inter SemiBold"/><a:cs typeface="Inter SemiBold"/><a:sym typeface="Inter SemiBold"/></a:endParaRPr></a:p></p:txBody></p:sp><p:sp><p:nvSpPr><p:cNvPr id="103" name="Google Shape;103;p18"/><p:cNvSpPr/><p:nvPr/></p:nvSpPr><p:spPr><a:xfrm><a:off x="43775" y="4892100"/><a:ext cx="9144000" cy="251400"/></a:xfrm><a:prstGeom prst="rect"><a:avLst/></a:prstGeom><a:solidFill><a:srgbClr val="C3FFFC"/></a:solidFill><a:ln><a:noFill/></a:ln></p:spPr><p:txBody><a:bodyPr anchorCtr="0" anchor="ctr" bIns="91425" lIns="91425" spcFirstLastPara="1" rIns="91425" wrap="square" tIns="91425"><a:noAutofit/></a:bodyPr><a:lstStyle/><a:p><a:pPr indent="0" lvl="0" marL="0" marR="0" rtl="0" algn="l"><a:lnSpc><a:spcPct val="100000"/></a:lnSpc><a:spcBef><a:spcPts val="0"/></a:spcBef><a:spcAft><a:spcPts val="0"/></a:spcAft><a:buClr><a:srgbClr val="000000"/></a:buClr><a:buSzPts val="1400"/><a:buFont typeface="Arial"/><a:buNone/></a:pPr><a:r><a:t></a:t></a:r><a:endParaRPr b="0" i="0" sz="1400" u="none" cap="none" strike="noStrike"><a:solidFill><a:srgbClr val="000000"/></a:solidFill><a:latin typeface="Arial"/><a:ea typeface="Arial"/><a:cs typeface="Arial"/><a:sym typeface="Arial"/></a:endParaRPr></a:p></p:txBody></p:sp><p:pic><p:nvPicPr><p:cNvPr id="104" name="Google Shape;104;p18"/><p:cNvPicPr preferRelativeResize="0"/><p:nvPr/></p:nvPicPr><p:blipFill rotWithShape="1"><a:blip r:embed="rId3"><a:alphaModFix/></a:blip><a:srcRect b="0" l="0" r="0" t="0"/><a:stretch/></p:blipFill><p:spPr><a:xfrm><a:off x="496925" y="482927"/><a:ext cx="576900" cy="385904"/></a:xfrm><a:prstGeom prst="rect"><a:avLst/></a:prstGeom><a:noFill/><a:ln><a:noFill/></a:ln></p:spPr></p:pic><p:sp><p:nvSpPr><p:cNvPr id="105" name="Google Shape;105;p18"/><p:cNvSpPr txBox="1"/><p:nvPr/></p:nvSpPr><p:spPr><a:xfrm><a:off x="3518399" y="329500"/><a:ext cx="5163600" cy="738900"/></a:xfrm><a:prstGeom prst="rect"><a:avLst/></a:prstGeom><a:noFill/><a:ln><a:noFill/></a:ln></p:spPr><p:txBody><a:bodyPr anchorCtr="0" anchor="t" bIns="91425" lIns="91425" spcFirstLastPara="1" rIns="91425" wrap="square" tIns="91425"><a:spAutoFit/></a:bodyPr><a:lstStyle/><a:p><a:pPr indent="0" lvl="0" marL="0" rtl="0" algn="l"><a:spcBef><a:spcPts val="0"/></a:spcBef><a:spcAft><a:spcPts val="0"/></a:spcAft><a:buNone/></a:pPr><a:r><a:rPr lang="fr" sz="1800"><a:solidFill><a:schemeClr val="dk2"/></a:solidFill></a:rPr><a:t>API publique des avis Steam</a:t></a:r><a:br><a:rPr lang="fr" sz="1800"><a:solidFill><a:schemeClr val="dk2"/></a:solidFill></a:rPr></a:br><a:r><a:rPr lang="fr" sz="1800"><a:solidFill><a:schemeClr val="dk2"/></a:solidFill></a:rPr><a:t>9 271 lignes brutes — 3 jeux, anglais et français</a:t></a:r><a:endParaRPr sz="1800"><a:solidFill><a:schemeClr val="dk2"/></a:solidFill></a:endParaRPr></a:p></p:txBody></p:sp><p:sp><p:nvSpPr><p:cNvPr id="106" name="Google Shape;106;p18"/><p:cNvSpPr/><p:nvPr/></p:nvSpPr><p:spPr><a:xfrm><a:off x="402939" y="1156461"/><a:ext cx="3615000" cy="193800"/></a:xfrm><a:prstGeom prst="rect"><a:avLst/></a:prstGeom><a:noFill/><a:ln><a:noFill/></a:ln></p:spPr><p:txBody><a:bodyPr anchorCtr="0" anchor="t" bIns="0" lIns="0" spcFirstLastPara="1" rIns="0" wrap="square" tIns="0"><a:noAutofit/></a:bodyPr><a:lstStyle/><a:p><a:pPr indent="0" lvl="0" marL="0" marR="0" rtl="0" algn="l"><a:lnSpc><a:spcPct val="125000"/></a:lnSpc><a:spcBef><a:spcPts val="0"/></a:spcBef><a:spcAft><a:spcPts val="0"/></a:spcAft><a:buClr><a:srgbClr val="0C0D0F"/></a:buClr><a:buSzPts val="1217"/><a:buFont typeface="Inter"/><a:buNone/></a:pPr><a:r><a:rPr lang="fr" sz="1217"><a:solidFill><a:srgbClr val="0C0D0F"/></a:solidFill><a:latin typeface="Inter"/><a:ea typeface="Inter"/><a:cs typeface="Inter"/><a:sym typeface="Inter"/></a:rPr><a:t>Traitement en 5 étapes, testé à chaque passage</a:t></a:r><a:endParaRPr b="0" i="0" sz="1217" u="none" cap="none" strike="noStrike"/></a:p></p:txBody></p:sp><p:sp><p:nvSpPr><p:cNvPr id="107" name="Google Shape;107;p18"/><p:cNvSpPr/><p:nvPr/></p:nvSpPr><p:spPr><a:xfrm><a:off x="402961" y="1448759"/><a:ext cx="1498200" cy="711900"/></a:xfrm><a:prstGeom prst="roundRect"><a:avLst><a:gd fmla="val 11687" name="adj"/></a:avLst></a:prstGeom><a:solidFill><a:srgbClr val="FFFFFF"/></a:solidFill><a:ln cap="flat" cmpd="sng" w="8125"><a:solidFill><a:srgbClr val="FF7047"/></a:solidFill><a:prstDash val="solid"/><a:round/><a:headEnd len="sm" w="sm" type="none"/><a:tailEnd len="sm" w="sm" type="none"/ xml:space="preserve"> 1. </a:t></a:r><a:r><a:rPr b="1" lang="fr" sz="1054"><a:solidFill><a:srgbClr val="55575A"/></a:solidFill><a:latin typeface="Manrope"/><a:ea typeface="Manrope"/><a:cs typeface="Manrope"/><a:sym typeface="Manrope"/></a:rPr><a:t>Zone brute inchangée</a:t></a:r><a:endParaRPr b="1" sz="1054"><a:solidFill><a:srgbClr val="55575A"/></a:solidFill><a:latin typeface="Manrope"/><a:ea typeface="Manrope"/><a:cs typeface="Manrope"/><a:sym typeface="Manrope"/></a:endParaRPr></a:p></p:txBody></p:sp><p:sp><p:nvSpPr><p:cNvPr id="108" name="Google Shape;108;p18"/><p:cNvSpPr/><p:nvPr/></p:nvSpPr><p:spPr><a:xfrm><a:off x="2194798" y="1438311"/><a:ext cx="1498200" cy="711900"/></a:xfrm><a:prstGeom prst="roundRect"><a:avLst><a:gd fmla="val 11687" name="adj"/></a:avLst></a:prstGeom><a:solidFill><a:srgbClr val="FFFFFF"/></a:solidFill><a:ln cap="flat" cmpd="sng" w="8125"><a:solidFill><a:srgbClr val="FF7047"/></a:solidFill><a:prstDash val="solid"/><a:round/><a:headEnd len="sm" w="sm" type="none"/><a:tailEnd len="sm" w="sm" type="none"/ xml:space="preserve">2. Dédoublonnage </a:t></a:r><a:br><a:rPr b="1" lang="fr" sz="1000"><a:solidFill><a:srgbClr val="55575A"/></a:solidFill><a:latin typeface="Manrope"/><a:ea typeface="Manrope"/><a:cs typeface="Manrope"/><a:sym typeface="Manrope"/></a:rPr></a:br><a:r><a:rPr b="1" lang="fr" sz="1000"><a:solidFill><a:srgbClr val="55575A"/></a:solidFill><a:latin typeface="Manrope"/><a:ea typeface="Manrope"/><a:cs typeface="Manrope"/><a:sym typeface="Manrope"/></a:rPr><a:t>et nettoyage du BBCode</a:t></a:r><a:endParaRPr b="1" sz="1000"><a:solidFill><a:srgbClr val="55575A"/></a:solidFill><a:latin typeface="Manrope"/><a:ea typeface="Manrope"/><a:cs typeface="Manrope"/><a:sym typeface="Manrope"/></a:endParaRPr></a:p></p:txBody></p:sp><p:sp><p:nvSpPr><p:cNvPr id="109" name="Google Shape;109;p18"/><p:cNvSpPr/><p:nvPr/></p:nvSpPr><p:spPr><a:xfrm><a:off x="3764412" y="1449638"/><a:ext cx="1498200" cy="711900"/></a:xfrm><a:prstGeom prst="roundRect"><a:avLst><a:gd fmla="val 11687" name="adj"/></a:avLst></a:prstGeom><a:solidFill><a:srgbClr val="FFFFFF"/></a:solidFill><a:ln cap="flat" cmpd="sng" w="8125"><a:solidFill><a:srgbClr val="FF7047"/></a:solidFill><a:prstDash val="solid"/><a:round/><a:headEnd len="sm" w="sm" type="none"/><a:tailEnd len="sm" w="sm" type="none"/>3. Pseudonymisation HMAC</a:t></a:r><a:endParaRPr b="1" sz="1200"><a:solidFill><a:srgbClr val="55575A"/></a:solidFill><a:latin typeface="Manrope"/><a:ea typeface="Manrope"/><a:cs typeface="Manrope"/><a:sym typeface="Manrope"/></a:endParaRPr></a:p></p:txBody></p:sp><p:sp><p:nvSpPr><p:cNvPr id="110" name="Google Shape;110;p18"/><p:cNvSpPr/><p:nvPr/></p:nvSpPr><p:spPr><a:xfrm><a:off x="5351099" y="1449650"/><a:ext cx="1498200" cy="711900"/></a:xfrm><a:prstGeom prst="roundRect"><a:avLst><a:gd fmla="val 11687" name="adj"/></a:avLst></a:prstGeom><a:solidFill><a:srgbClr val="FFFFFF"/></a:solidFill><a:ln cap="flat" cmpd="sng" w="8125"><a:solidFill><a:srgbClr val="FF7047"/></a:solidFill><a:prstDash val="solid"/><a:round/><a:headEnd len="sm" w="sm" type="none"/><a:tailEnd len="sm" w="sm" type="none"/>4. Contrôles bloquants</a:t></a:r><a:endParaRPr b="1" sz="1200"><a:solidFill><a:srgbClr val="55575A"/></a:solidFill><a:latin typeface="Manrope"/><a:ea typeface="Manrope"/><a:cs typeface="Manrope"/><a:sym typeface="Manrope"/></a:endParaRPr></a:p></p:txBody></p:sp><p:sp><p:nvSpPr><p:cNvPr id="111" name="Google Shape;111;p18"/><p:cNvSpPr/><p:nvPr/></p:nvSpPr><p:spPr><a:xfrm><a:off x="6937799" y="1460100"/><a:ext cx="1498200" cy="711900"/></a:xfrm><a:prstGeom prst="roundRect"><a:avLst><a:gd fmla="val 11687" name="adj"/></a:avLst></a:prstGeom><a:solidFill><a:srgbClr val="FFFFFF"/></a:solidFill><a:ln cap="flat" cmpd="sng" w="8125"><a:solidFill><a:srgbClr val="FF7047"/></a:solidFill><a:prstDash val="solid"/><a:round/><a:headEnd len="sm" w="sm" type="none"/><a:tailEnd len="sm" w="sm" type="none"/>5. Great Expectations</a:t></a:r><a:endParaRPr b="1" sz="1200"><a:solidFill><a:srgbClr val="55575A"/></a:solidFill><a:latin typeface="Manrope"/><a:ea typeface="Manrope"/><a:cs typeface="Manrope"/><a:sym typeface="Manrope"/></a:endParaRPr></a:p></p:txBody></p:sp><p:sp><p:nvSpPr><p:cNvPr id="112" name="Google Shape;112;p18"/><p:cNvSpPr txBox="1"/><p:nvPr/></p:nvSpPr><p:spPr><a:xfrm><a:off x="402950" y="2701550"/><a:ext cx="8033100" cy="1639200"/></a:xfrm><a:prstGeom prst="rect"><a:avLst/></a:prstGeom><a:noFill/><a:ln><a:noFill/></a:ln></p:spPr><p:txBody><a:bodyPr anchorCtr="0" anchor="t" bIns="91425" lIns="91425" spcFirstLastPara="1" rIns="91425" wrap="square" tIns="91425"><a:spAutoFit/></a:bodyPr><a:lstStyle/><a:p><a:pPr indent="0" lvl="0" marL="0" rtl="0" algn="l"><a:lnSpc><a:spcPct val="115000"/></a:lnSpc><a:spcBef><a:spcPts val="0"/></a:spcBef><a:spcAft><a:spcPts val="0"/></a:spcAft><a:buNone/></a:pPr><a:r><a:rPr b="1" lang="fr"><a:solidFill><a:srgbClr val="015955"/></a:solidFill><a:highlight><a:schemeClr val="lt1"/></a:highlight></a:rPr><a:t>Confidentialité :</a:t></a:r><a:r><a:rPr lang="fr"><a:solidFill><a:srgbClr val="27251E"/></a:solidFill><a:highlight><a:schemeClr val="lt1"/></a:highlight></a:rPr><a:t> </a:t></a:r><a:endParaRPr><a:solidFill><a:srgbClr val="27251E"/></a:solidFill><a:highlight><a:schemeClr val="lt1"/></a:highlight></a:endParaRPr></a:p><a:p><a:pPr indent="-317500" lvl="0" marL="457200" rtl="0" algn="l"><a:lnSpc><a:spcPct val="115000"/></a:lnSpc><a:spcBef><a:spcPts val="0"/></a:spcBef><a:spcAft><a:spcPts val="0"/></a:spcAft><a:buClr><a:schemeClr val="dk2"/></a:buClr><a:buSzPts val="1400"/><a:buChar char="●"/></a:pPr><a:r><a:rPr lang="fr"><a:solidFill><a:schemeClr val="dk2"/></a:solidFill><a:highlight><a:schemeClr val="lt1"/></a:highlight></a:rPr><a:t>steamid</a:t></a:r><a:r><a:rPr lang="fr"><a:solidFill><a:schemeClr val="dk2"/></a:solidFill></a:rPr><a:t xml:space="preserve"> </a:t></a:r><a:r><a:rPr b="1" lang="fr"><a:solidFill><a:schemeClr val="dk2"/></a:solidFill></a:rPr><a:t>→ pseudonymisé (HMAC salé)</a:t></a:r><a:endParaRPr b="1"><a:solidFill><a:schemeClr val="dk2"/></a:solidFill></a:endParaRPr></a:p><a:p><a:pPr indent="-317500" lvl="0" marL="457200" rtl="0" algn="l"><a:lnSpc><a:spcPct val="115000"/></a:lnSpc><a:spcBef><a:spcPts val="0"/></a:spcBef><a:spcAft><a:spcPts val="0"/></a:spcAft><a:buClr><a:schemeClr val="dk2"/></a:buClr><a:buSzPts val="1400"/><a:buChar char="●"/></a:pPr><a:r><a:rPr lang="fr"><a:solidFill><a:schemeClr val="dk2"/></a:solidFill><a:highlight><a:schemeClr val="lt1"/></a:highlight></a:rPr><a:t>personaname, profile_url, avatar : identifiants directs</a:t></a:r><a:r><a:rPr lang="fr"><a:solidFill><a:schemeClr val="dk2"/></a:solidFill></a:rPr><a:t xml:space="preserve"> → </a:t></a:r><a:r><a:rPr b="1" lang="fr"><a:solidFill><a:schemeClr val="dk2"/></a:solidFill></a:rPr><a:t xml:space="preserve">supprimés dès la zone propre </a:t></a:r><a:endParaRPr b="1"><a:solidFill><a:schemeClr val="dk2"/></a:solidFill></a:endParaRPr></a:p><a:p><a:pPr indent="-317500" lvl="0" marL="457200" rtl="0" algn="l"><a:lnSpc><a:spcPct val="115000"/></a:lnSpc><a:spcBef><a:spcPts val="0"/></a:spcBef><a:spcAft><a:spcPts val="0"/></a:spcAft><a:buClr><a:schemeClr val="dk2"/></a:buClr><a:buSzPts val="1400"/><a:buChar char="●"/></a:pPr><a:r><a:rPr lang="fr"><a:solidFill><a:schemeClr val="dk2"/></a:solidFill><a:highlight><a:schemeClr val="lt1"/></a:highlight></a:rPr><a:t>Flux complémentaire</a:t></a:r><a:r><a:rPr lang="fr"><a:solidFill><a:schemeClr val="dk2"/></a:solidFill></a:rPr><a:t xml:space="preserve"> d'avis négatifs </a:t></a:r><a:r><a:rPr b="1" lang="fr"><a:solidFill><a:schemeClr val="dk2"/></a:solidFill></a:rPr><a:t>→ entraînement seulement</a:t></a:r><a:endParaRPr b="1"><a:solidFill><a:schemeClr val="dk2"/></a:solidFill></a:endParaRPr></a:p><a:p><a:pPr indent="-317500" lvl="0" marL="457200" rtl="0" algn="l"><a:lnSpc><a:spcPct val="115000"/></a:lnSpc><a:spcBef><a:spcPts val="0"/></a:spcBef><a:spcAft><a:spcPts val="0"/></a:spcAft><a:buClr><a:schemeClr val="dk2"/></a:buClr><a:buSzPts val="1400"/><a:buChar char="●"/></a:pPr><a:r><a:rPr lang="fr"><a:solidFill><a:schemeClr val="dk2"/></a:solidFill></a:rPr><a:t xml:space="preserve">Idempotence : un second passage n'écrit aucun doublon </a:t></a:r><a:r><a:rPr b="1" lang="fr"><a:solidFill><a:schemeClr val="dk2"/></a:solidFill></a:rPr><a:t>(manifeste)</a:t></a:r><a:endParaRPr><a:solidFill><a:schemeClr val="dk2"/></a:solidFill></a:endParaRPr></a:p><a:p><a:pPr indent="-317500" lvl="0" marL="457200" rtl="0" algn="l"><a:lnSpc><a:spcPct val="115000"/></a:lnSpc><a:spcBef><a:spcPts val="0"/></a:spcBef><a:spcAft><a:spcPts val="0"/></a:spcAft><a:buClr><a:schemeClr val="dk2"/></a:buClr><a:buSzPts val="1400"/><a:buChar char="●"/></a:pPr><a:r><a:rPr lang="fr"><a:solidFill><a:schemeClr val="dk2"/></a:solidFill></a:rPr><a:t xml:space="preserve">Zone silver Iceberg </a:t></a:r><a:r><a:rPr b="1" lang="fr"><a:solidFill><a:schemeClr val="dk2"/></a:solidFill></a:rPr><a:t xml:space="preserve">→ 19 instantanés versionnés </a:t></a:r><a:r><a:rPr lang="fr"><a:solidFill><a:schemeClr val="dk2"/></a:solidFill></a:rPr><a:t></a:t></a:r><a:endParaRPr sz="1800"><a:solidFill><a:schemeClr val="dk2"/></a:solidFill></a:endParaRPr></a:p></p:txBody></p:sp></p:spTree></p:cSld><p:clrMapOvr><a:masterClrMapping/></p:clrMapOvr></p:sld>
+<p:sld xmlns:a="http://schemas.openxmlformats.org/drawingml/2006/main" xmlns:r="http://schemas.openxmlformats.org/officeDocument/2006/relationships" xmlns:mc="http://schemas.openxmlformats.org/markup-compatibility/2006" xmlns:mv="urn:schemas-microsoft-com:mac:vml" xmlns:p="http://schemas.openxmlformats.org/presentationml/2006/main" xmlns:c="http://schemas.openxmlformats.org/drawingml/2006/chart" xmlns:dgm="http://schemas.openxmlformats.org/drawingml/2006/diagram" xmlns:o="urn:schemas-microsoft-com:office:office" xmlns:v="urn:schemas-microsoft-com:vml" xmlns:pvml="urn:schemas-microsoft-com:office:powerpoint" xmlns:com="http://schemas.openxmlformats.org/drawingml/2006/compatibility" xmlns:p14="http://schemas.microsoft.com/office/powerpoint/2010/main" xmlns:p15="http://schemas.microsoft.com/office/powerpoint/2012/main" xmlns:ahyp="http://schemas.microsoft.com/office/drawing/2018/hyperlinkcolor"><p:cSld><p:spTree><p:nvGrpSpPr><p:cNvPr id="101" name="Shape 101"/><p:cNvGrpSpPr/><p:nvPr/></p:nvGrpSpPr><p:grpSpPr><a:xfrm><a:off x="0" y="0"/><a:ext cx="0" cy="0"/><a:chOff x="0" y="0"/><a:chExt cx="0" cy="0"/></a:xfrm></p:grpSpPr><p:sp><p:nvSpPr><p:cNvPr id="102" name="Google Shape;102;p18"/><p:cNvSpPr txBox="1"/><p:nvPr><p:ph idx="4294967295" type="ctrTitle"/></p:nvPr></p:nvSpPr><p:spPr><a:xfrm><a:off x="1073814" y="409334"/><a:ext cx="5315100" cy="533100"/></a:xfrm><a:prstGeom prst="rect"><a:avLst/></a:prstGeom><a:noFill/><a:ln><a:noFill/></a:ln></p:spPr><p:txBody><a:bodyPr anchorCtr="0" anchor="t" bIns="91425" lIns="91425" spcFirstLastPara="1" rIns="91425" wrap="square" tIns="91425"><a:noAutofit/></a:bodyPr><a:lstStyle/><a:p><a:pPr indent="0" lvl="0" marL="0" marR="0" rtl="0" algn="l"><a:lnSpc><a:spcPct val="100000"/></a:lnSpc><a:spcBef><a:spcPts val="0"/></a:spcBef><a:spcAft><a:spcPts val="0"/></a:spcAft><a:buNone/></a:pPr><a:r><a:rPr lang="fr" sz="2500"><a:solidFill><a:srgbClr val="0E3449"/></a:solidFill><a:latin typeface="Inter SemiBold"/><a:ea typeface="Inter SemiBold"/><a:cs typeface="Inter SemiBold"/><a:sym typeface="Inter SemiBold"/></a:rPr><a:t>2.   Les données</a:t></a:r><a:endParaRPr i="0" sz="2500" u="none" cap="none" strike="noStrike"><a:solidFill><a:srgbClr val="0E3449"/></a:solidFill><a:latin typeface="Inter SemiBold"/><a:ea typeface="Inter SemiBold"/><a:cs typeface="Inter SemiBold"/><a:sym typeface="Inter SemiBold"/></a:endParaRPr></a:p></p:txBody></p:sp><p:sp><p:nvSpPr><p:cNvPr id="103" name="Google Shape;103;p18"/><p:cNvSpPr/><p:nvPr/></p:nvSpPr><p:spPr><a:xfrm><a:off x="43775" y="4892100"/><a:ext cx="9144000" cy="251400"/></a:xfrm><a:prstGeom prst="rect"><a:avLst/></a:prstGeom><a:solidFill><a:srgbClr val="C3FFFC"/></a:solidFill><a:ln><a:noFill/></a:ln></p:spPr><p:txBody><a:bodyPr anchorCtr="0" anchor="ctr" bIns="91425" lIns="91425" spcFirstLastPara="1" rIns="91425" wrap="square" tIns="91425"><a:noAutofit/></a:bodyPr><a:lstStyle/><a:p><a:pPr indent="0" lvl="0" marL="0" marR="0" rtl="0" algn="l"><a:lnSpc><a:spcPct val="100000"/></a:lnSpc><a:spcBef><a:spcPts val="0"/></a:spcBef><a:spcAft><a:spcPts val="0"/></a:spcAft><a:buClr><a:srgbClr val="000000"/></a:buClr><a:buSzPts val="1400"/><a:buFont typeface="Arial"/><a:buNone/></a:pPr><a:r><a:t></a:t></a:r><a:endParaRPr b="0" i="0" sz="1400" u="none" cap="none" strike="noStrike"><a:solidFill><a:srgbClr val="000000"/></a:solidFill><a:latin typeface="Arial"/><a:ea typeface="Arial"/><a:cs typeface="Arial"/><a:sym typeface="Arial"/></a:endParaRPr></a:p></p:txBody></p:sp><p:pic><p:nvPicPr><p:cNvPr id="104" name="Google Shape;104;p18"/><p:cNvPicPr preferRelativeResize="0"/><p:nvPr/></p:nvPicPr><p:blipFill rotWithShape="1"><a:blip r:embed="rId3"><a:alphaModFix/></a:blip><a:srcRect b="0" l="0" r="0" t="0"/><a:stretch/></p:blipFill><p:spPr><a:xfrm><a:off x="496925" y="482927"/><a:ext cx="576900" cy="385904"/></a:xfrm><a:prstGeom prst="rect"><a:avLst/></a:prstGeom><a:noFill/><a:ln><a:noFill/></a:ln></p:spPr></p:pic><p:sp><p:nvSpPr><p:cNvPr id="105" name="Google Shape;105;p18"/><p:cNvSpPr txBox="1"/><p:nvPr/></p:nvSpPr><p:spPr><a:xfrm><a:off x="3518399" y="329500"/><a:ext cx="5163600" cy="738900"/></a:xfrm><a:prstGeom prst="rect"><a:avLst/></a:prstGeom><a:noFill/><a:ln><a:noFill/></a:ln></p:spPr><p:txBody><a:bodyPr anchorCtr="0" anchor="t" bIns="91425" lIns="91425" spcFirstLastPara="1" rIns="91425" wrap="square" tIns="91425"><a:spAutoFit/></a:bodyPr><a:lstStyle/><a:p><a:pPr indent="0" lvl="0" marL="0" rtl="0" algn="l"><a:spcBef><a:spcPts val="0"/></a:spcBef><a:spcAft><a:spcPts val="0"/></a:spcAft><a:buNone/></a:pPr><a:r><a:rPr lang="fr" sz="1800"><a:solidFill><a:schemeClr val="dk2"/></a:solidFill></a:rPr><a:t>API publique des avis Steam</a:t></a:r><a:br><a:rPr lang="fr" sz="1800"><a:solidFill><a:schemeClr val="dk2"/></a:solidFill></a:rPr></a:br><a:r><a:rPr lang="fr" sz="1800"><a:solidFill><a:schemeClr val="dk2"/></a:solidFill></a:rPr><a:t>9 410 lignes brutes — 3 jeux, anglais et français</a:t></a:r><a:endParaRPr sz="1800"><a:solidFill><a:schemeClr val="dk2"/></a:solidFill></a:endParaRPr></a:p></p:txBody></p:sp><p:sp><p:nvSpPr><p:cNvPr id="106" name="Google Shape;106;p18"/><p:cNvSpPr/><p:nvPr/></p:nvSpPr><p:spPr><a:xfrm><a:off x="402939" y="1156461"/><a:ext cx="3615000" cy="193800"/></a:xfrm><a:prstGeom prst="rect"><a:avLst/></a:prstGeom><a:noFill/><a:ln><a:noFill/></a:ln></p:spPr><p:txBody><a:bodyPr anchorCtr="0" anchor="t" bIns="0" lIns="0" spcFirstLastPara="1" rIns="0" wrap="square" tIns="0"><a:noAutofit/></a:bodyPr><a:lstStyle/><a:p><a:pPr indent="0" lvl="0" marL="0" marR="0" rtl="0" algn="l"><a:lnSpc><a:spcPct val="125000"/></a:lnSpc><a:spcBef><a:spcPts val="0"/></a:spcBef><a:spcAft><a:spcPts val="0"/></a:spcAft><a:buClr><a:srgbClr val="0C0D0F"/></a:buClr><a:buSzPts val="1217"/><a:buFont typeface="Inter"/><a:buNone/></a:pPr><a:r><a:rPr lang="fr" sz="1217"><a:solidFill><a:srgbClr val="0C0D0F"/></a:solidFill><a:latin typeface="Inter"/><a:ea typeface="Inter"/><a:cs typeface="Inter"/><a:sym typeface="Inter"/></a:rPr><a:t>Traitement en 5 étapes, testé à chaque passage</a:t></a:r><a:endParaRPr b="0" i="0" sz="1217" u="none" cap="none" strike="noStrike"/></a:p></p:txBody></p:sp><p:sp><p:nvSpPr><p:cNvPr id="107" name="Google Shape;107;p18"/><p:cNvSpPr/><p:nvPr/></p:nvSpPr><p:spPr><a:xfrm><a:off x="402961" y="1448759"/><a:ext cx="1498200" cy="711900"/></a:xfrm><a:prstGeom prst="roundRect"><a:avLst><a:gd fmla="val 11687" name="adj"/></a:avLst></a:prstGeom><a:solidFill><a:srgbClr val="FFFFFF"/></a:solidFill><a:ln cap="flat" cmpd="sng" w="8125"><a:solidFill><a:srgbClr val="FF7047"/></a:solidFill><a:prstDash val="solid"/><a:round/><a:headEnd len="sm" w="sm" type="none"/><a:tailEnd len="sm" w="sm" type="none"/ xml:space="preserve"> 1. </a:t></a:r><a:r><a:rPr b="1" lang="fr" sz="1054"><a:solidFill><a:srgbClr val="55575A"/></a:solidFill><a:latin typeface="Manrope"/><a:ea typeface="Manrope"/><a:cs typeface="Manrope"/><a:sym typeface="Manrope"/></a:rPr><a:t>Zone brute inchangée</a:t></a:r><a:endParaRPr b="1" sz="1054"><a:solidFill><a:srgbClr val="55575A"/></a:solidFill><a:latin typeface="Manrope"/><a:ea typeface="Manrope"/><a:cs typeface="Manrope"/><a:sym typeface="Manrope"/></a:endParaRPr></a:p></p:txBody></p:sp><p:sp><p:nvSpPr><p:cNvPr id="108" name="Google Shape;108;p18"/><p:cNvSpPr/><p:nvPr/></p:nvSpPr><p:spPr><a:xfrm><a:off x="2194798" y="1438311"/><a:ext cx="1498200" cy="711900"/></a:xfrm><a:prstGeom prst="roundRect"><a:avLst><a:gd fmla="val 11687" name="adj"/></a:avLst></a:prstGeom><a:solidFill><a:srgbClr val="FFFFFF"/></a:solidFill><a:ln cap="flat" cmpd="sng" w="8125"><a:solidFill><a:srgbClr val="FF7047"/></a:solidFill><a:prstDash val="solid"/><a:round/><a:headEnd len="sm" w="sm" type="none"/><a:tailEnd len="sm" w="sm" type="none"/ xml:space="preserve">2. Dédoublonnage </a:t></a:r><a:br><a:rPr b="1" lang="fr" sz="1000"><a:solidFill><a:srgbClr val="55575A"/></a:solidFill><a:latin typeface="Manrope"/><a:ea typeface="Manrope"/><a:cs typeface="Manrope"/><a:sym typeface="Manrope"/></a:rPr></a:br><a:r><a:rPr b="1" lang="fr" sz="1000"><a:solidFill><a:srgbClr val="55575A"/></a:solidFill><a:latin typeface="Manrope"/><a:ea typeface="Manrope"/><a:cs typeface="Manrope"/><a:sym typeface="Manrope"/></a:rPr><a:t>et nettoyage du BBCode</a:t></a:r><a:endParaRPr b="1" sz="1000"><a:solidFill><a:srgbClr val="55575A"/></a:solidFill><a:latin typeface="Manrope"/><a:ea typeface="Manrope"/><a:cs typeface="Manrope"/><a:sym typeface="Manrope"/></a:endParaRPr></a:p></p:txBody></p:sp><p:sp><p:nvSpPr><p:cNvPr id="109" name="Google Shape;109;p18"/><p:cNvSpPr/><p:nvPr/></p:nvSpPr><p:spPr><a:xfrm><a:off x="3764412" y="1449638"/><a:ext cx="1498200" cy="711900"/></a:xfrm><a:prstGeom prst="roundRect"><a:avLst><a:gd fmla="val 11687" name="adj"/></a:avLst></a:prstGeom><a:solidFill><a:srgbClr val="FFFFFF"/></a:solidFill><a:ln cap="flat" cmpd="sng" w="8125"><a:solidFill><a:srgbClr val="FF7047"/></a:solidFill><a:prstDash val="solid"/><a:round/><a:headEnd len="sm" w="sm" type="none"/><a:tailEnd len="sm" w="sm" type="none"/>3. Pseudonymisation HMAC</a:t></a:r><a:endParaRPr b="1" sz="1200"><a:solidFill><a:srgbClr val="55575A"/></a:solidFill><a:latin typeface="Manrope"/><a:ea typeface="Manrope"/><a:cs typeface="Manrope"/><a:sym typeface="Manrope"/></a:endParaRPr></a:p></p:txBody></p:sp><p:sp><p:nvSpPr><p:cNvPr id="110" name="Google Shape;110;p18"/><p:cNvSpPr/><p:nvPr/></p:nvSpPr><p:spPr><a:xfrm><a:off x="5351099" y="1449650"/><a:ext cx="1498200" cy="711900"/></a:xfrm><a:prstGeom prst="roundRect"><a:avLst><a:gd fmla="val 11687" name="adj"/></a:avLst></a:prstGeom><a:solidFill><a:srgbClr val="FFFFFF"/></a:solidFill><a:ln cap="flat" cmpd="sng" w="8125"><a:solidFill><a:srgbClr val="FF7047"/></a:solidFill><a:prstDash val="solid"/><a:round/><a:headEnd len="sm" w="sm" type="none"/><a:tailEnd len="sm" w="sm" type="none"/>4. Contrôles bloquants</a:t></a:r><a:endParaRPr b="1" sz="1200"><a:solidFill><a:srgbClr val="55575A"/></a:solidFill><a:latin typeface="Manrope"/><a:ea typeface="Manrope"/><a:cs typeface="Manrope"/><a:sym typeface="Manrope"/></a:endParaRPr></a:p></p:txBody></p:sp><p:sp><p:nvSpPr><p:cNvPr id="111" name="Google Shape;111;p18"/><p:cNvSpPr/><p:nvPr/></p:nvSpPr><p:spPr><a:xfrm><a:off x="6937799" y="1460100"/><a:ext cx="1498200" cy="711900"/></a:xfrm><a:prstGeom prst="roundRect"><a:avLst><a:gd fmla="val 11687" name="adj"/></a:avLst></a:prstGeom><a:solidFill><a:srgbClr val="FFFFFF"/></a:solidFill><a:ln cap="flat" cmpd="sng" w="8125"><a:solidFill><a:srgbClr val="FF7047"/></a:solidFill><a:prstDash val="solid"/><a:round/><a:headEnd len="sm" w="sm" type="none"/><a:tailEnd len="sm" w="sm" type="none"/>5. Great Expectations</a:t></a:r><a:endParaRPr b="1" sz="1200"><a:solidFill><a:srgbClr val="55575A"/></a:solidFill><a:latin typeface="Manrope"/><a:ea typeface="Manrope"/><a:cs typeface="Manrope"/><a:sym typeface="Manrope"/></a:endParaRPr></a:p></p:txBody></p:sp><p:sp><p:nvSpPr><p:cNvPr id="112" name="Google Shape;112;p18"/><p:cNvSpPr txBox="1"/><p:nvPr/></p:nvSpPr><p:spPr><a:xfrm><a:off x="402950" y="2701550"/><a:ext cx="8033100" cy="1639200"/></a:xfrm><a:prstGeom prst="rect"><a:avLst/></a:prstGeom><a:noFill/><a:ln><a:noFill/></a:ln></p:spPr><p:txBody><a:bodyPr anchorCtr="0" anchor="t" bIns="91425" lIns="91425" spcFirstLastPara="1" rIns="91425" wrap="square" tIns="91425"><a:spAutoFit/></a:bodyPr><a:lstStyle/><a:p><a:pPr indent="0" lvl="0" marL="0" rtl="0" algn="l"><a:lnSpc><a:spcPct val="115000"/></a:lnSpc><a:spcBef><a:spcPts val="0"/></a:spcBef><a:spcAft><a:spcPts val="0"/></a:spcAft><a:buNone/></a:pPr><a:r><a:rPr b="1" lang="fr"><a:solidFill><a:srgbClr val="015955"/></a:solidFill><a:highlight><a:schemeClr val="lt1"/></a:highlight></a:rPr><a:t>Confidentialité :</a:t></a:r><a:r><a:rPr lang="fr"><a:solidFill><a:srgbClr val="27251E"/></a:solidFill><a:highlight><a:schemeClr val="lt1"/></a:highlight></a:rPr><a:t> </a:t></a:r><a:endParaRPr><a:solidFill><a:srgbClr val="27251E"/></a:solidFill><a:highlight><a:schemeClr val="lt1"/></a:highlight></a:endParaRPr></a:p><a:p><a:pPr indent="-317500" lvl="0" marL="457200" rtl="0" algn="l"><a:lnSpc><a:spcPct val="115000"/></a:lnSpc><a:spcBef><a:spcPts val="0"/></a:spcBef><a:spcAft><a:spcPts val="0"/></a:spcAft><a:buClr><a:schemeClr val="dk2"/></a:buClr><a:buSzPts val="1400"/><a:buChar char="●"/></a:pPr><a:r><a:rPr lang="fr"><a:solidFill><a:schemeClr val="dk2"/></a:solidFill><a:highlight><a:schemeClr val="lt1"/></a:highlight></a:rPr><a:t>steamid</a:t></a:r><a:r><a:rPr lang="fr"><a:solidFill><a:schemeClr val="dk2"/></a:solidFill></a:rPr><a:t xml:space="preserve"> </a:t></a:r><a:r><a:rPr b="1" lang="fr"><a:solidFill><a:schemeClr val="dk2"/></a:solidFill></a:rPr><a:t>→ pseudonymisé (HMAC salé)</a:t></a:r><a:endParaRPr b="1"><a:solidFill><a:schemeClr val="dk2"/></a:solidFill></a:endParaRPr></a:p><a:p><a:pPr indent="-317500" lvl="0" marL="457200" rtl="0" algn="l"><a:lnSpc><a:spcPct val="115000"/></a:lnSpc><a:spcBef><a:spcPts val="0"/></a:spcBef><a:spcAft><a:spcPts val="0"/></a:spcAft><a:buClr><a:schemeClr val="dk2"/></a:buClr><a:buSzPts val="1400"/><a:buChar char="●"/></a:pPr><a:r><a:rPr lang="fr"><a:solidFill><a:schemeClr val="dk2"/></a:solidFill><a:highlight><a:schemeClr val="lt1"/></a:highlight></a:rPr><a:t>personaname, profile_url, avatar : identifiants directs</a:t></a:r><a:r><a:rPr lang="fr"><a:solidFill><a:schemeClr val="dk2"/></a:solidFill></a:rPr><a:t xml:space="preserve"> → </a:t></a:r><a:r><a:rPr b="1" lang="fr"><a:solidFill><a:schemeClr val="dk2"/></a:solidFill></a:rPr><a:t xml:space="preserve">supprimés dès la zone propre </a:t></a:r><a:endParaRPr b="1"><a:solidFill><a:schemeClr val="dk2"/></a:solidFill></a:endParaRPr></a:p><a:p><a:pPr indent="-317500" lvl="0" marL="457200" rtl="0" algn="l"><a:lnSpc><a:spcPct val="115000"/></a:lnSpc><a:spcBef><a:spcPts val="0"/></a:spcBef><a:spcAft><a:spcPts val="0"/></a:spcAft><a:buClr><a:schemeClr val="dk2"/></a:buClr><a:buSzPts val="1400"/><a:buChar char="●"/></a:pPr><a:r><a:rPr lang="fr"><a:solidFill><a:schemeClr val="dk2"/></a:solidFill><a:highlight><a:schemeClr val="lt1"/></a:highlight></a:rPr><a:t>Flux complémentaire</a:t></a:r><a:r><a:rPr lang="fr"><a:solidFill><a:schemeClr val="dk2"/></a:solidFill></a:rPr><a:t xml:space="preserve"> d'avis négatifs </a:t></a:r><a:r><a:rPr b="1" lang="fr"><a:solidFill><a:schemeClr val="dk2"/></a:solidFill></a:rPr><a:t>→ entraînement seulement</a:t></a:r><a:endParaRPr b="1"><a:solidFill><a:schemeClr val="dk2"/></a:solidFill></a:endParaRPr></a:p><a:p><a:pPr indent="-317500" lvl="0" marL="457200" rtl="0" algn="l"><a:lnSpc><a:spcPct val="115000"/></a:lnSpc><a:spcBef><a:spcPts val="0"/></a:spcBef><a:spcAft><a:spcPts val="0"/></a:spcAft><a:buClr><a:schemeClr val="dk2"/></a:buClr><a:buSzPts val="1400"/><a:buChar char="●"/></a:pPr><a:r><a:rPr lang="fr"><a:solidFill><a:schemeClr val="dk2"/></a:solidFill></a:rPr><a:t xml:space="preserve">Idempotence : un second passage n'écrit aucun doublon </a:t></a:r><a:r><a:rPr b="1" lang="fr"><a:solidFill><a:schemeClr val="dk2"/></a:solidFill></a:rPr><a:t>(manifeste)</a:t></a:r><a:endParaRPr><a:solidFill><a:schemeClr val="dk2"/></a:solidFill></a:endParaRPr></a:p><a:p><a:pPr indent="-317500" lvl="0" marL="457200" rtl="0" algn="l"><a:lnSpc><a:spcPct val="115000"/></a:lnSpc><a:spcBef><a:spcPts val="0"/></a:spcBef><a:spcAft><a:spcPts val="0"/></a:spcAft><a:buClr><a:schemeClr val="dk2"/></a:buClr><a:buSzPts val="1400"/><a:buChar char="●"/></a:pPr><a:r><a:rPr lang="fr"><a:solidFill><a:schemeClr val="dk2"/></a:solidFill></a:rPr><a:t xml:space="preserve">Zone silver Iceberg </a:t></a:r><a:r><a:rPr b="1" lang="fr"><a:solidFill><a:schemeClr val="dk2"/></a:solidFill></a:rPr><a:t xml:space="preserve">→ 27 instantanés versionnés, chacun restaurable </a:t></a:r><a:r><a:rPr lang="fr"><a:solidFill><a:schemeClr val="dk2"/></a:solidFill></a:rPr><a:t></a:t></a:r><a:endParaRPr sz="1800"><a:solidFill><a:schemeClr val="dk2"/></a:solidFill></a:endParaRPr></a:p></p:txBody></p:sp></p:spTree></p:cSld><p:clrMapOvr><a:masterClrMapping/></p:clrMapOvr></p:sld>
 </file>
 
 <file path=ppt/theme/theme1.xml><?xml version="1.0" encoding="utf-8"?>

--- a/docs/presentation/ReviewPulse_DemoDay.pptx
+++ b/docs/presentation/ReviewPulse_DemoDay.pptx
@@ -8949,7 +8949,7 @@
                   <a:schemeClr val="dk2"/>
                 </a:solidFill>
               </a:rPr>
-              <a:t>131 verts</a:t>
+              <a:t>144 verts</a:t>
             </a:r>
             <a:r>
               <a:rPr lang="fr" sz="2400">

--- a/docs/presentation/ReviewPulse_DemoDay.pptx
+++ b/docs/presentation/ReviewPulse_DemoDay.pptx
@@ -8276,7 +8276,7 @@
                   <a:srgbClr val="FFFFFF"/>
                 </a:highlight>
               </a:rPr>
-              <a:t>→ retenu</a:t>
+              <a:t>→ retenu : robuste aux fautes, explicable</a:t>
             </a:r>
             <a:endParaRPr b="1" sz="1200">
               <a:solidFill>
@@ -8309,7 +8309,7 @@
                   <a:srgbClr val="FFFFFF"/>
                 </a:highlight>
               </a:rPr>
-              <a:t>Pourquoi les n-grammes de caractères ?</a:t>
+              <a:t>Un autre modèle ferait-il mieux ? 9 candidats, mêmes plis</a:t>
             </a:r>
             <a:endParaRPr b="1" sz="1200">
               <a:solidFill>
@@ -8347,7 +8347,7 @@
                   <a:srgbClr val="FFFFFF"/>
                 </a:highlight>
               </a:rPr>
-              <a:t>Robustes aux fautes et aux variantes d'écriture</a:t>
+              <a:t>Régression logistique 0,812 · SVM 0,807 : égalité</a:t>
             </a:r>
             <a:endParaRPr sz="1200">
               <a:solidFill>
@@ -8385,7 +8385,7 @@
                   <a:srgbClr val="FFFFFF"/>
                 </a:highlight>
               </a:rPr>
-              <a:t>Entraînement en quelques secondes, explicable terme par terme</a:t>
+              <a:t>XGBoost 0,735 · forêt aléatoire 0,719 · coût × 23</a:t>
             </a:r>
             <a:endParaRPr sz="1200">
               <a:solidFill>
@@ -8423,7 +8423,7 @@
                   <a:srgbClr val="FFFFFF"/>
                 </a:highlight>
               </a:rPr>
-              <a:t>Seuil de décision appris, et non fixé à 0,5 — ADR 0006, 0007</a:t>
+              <a:t>Règle écrite avant les résultats — ADR 0006, 0007, 0030</a:t>
             </a:r>
             <a:endParaRPr sz="1200">
               <a:solidFill>
@@ -8776,7 +8776,7 @@
                   <a:schemeClr val="dk2"/>
                 </a:solidFill>
               </a:rPr>
-              <a:t>0,75</a:t>
+              <a:t>0,775</a:t>
             </a:r>
             <a:r>
               <a:rPr lang="fr" sz="2400">
@@ -9746,7 +9746,7 @@
                   <a:srgbClr val="FFFFFF"/>
                 </a:highlight>
               </a:rPr>
-              <a:t>Socle de briques réemployables — 29 décisions écrites, ADR 0001 à 0029. Chaque bloc garde son projet imposé : ce sont les briques qui circulent, pas le projet</a:t>
+              <a:t>Socle de briques réemployables — 30 décisions écrites, ADR 0001 à 0030. Chaque bloc garde son projet imposé : ce sont les briques qui circulent, pas le projet</a:t>
             </a:r>
             <a:endParaRPr sz="1300">
               <a:solidFill>

--- a/docs/presentation/ReviewPulse_DemoDay.pptx
+++ b/docs/presentation/ReviewPulse_DemoDay.pptx
@@ -10639,7 +10639,7 @@
 </file>
 
 <file path=ppt/slides/slide6.xml><?xml version="1.0" encoding="UTF-8" standalone="yes"?>-<p:sld xmlns:a="http://schemas.openxmlformats.org/drawingml/2006/main" xmlns:r="http://schemas.openxmlformats.org/officeDocument/2006/relationships" xmlns:mc="http://schemas.openxmlformats.org/markup-compatibility/2006" xmlns:mv="urn:schemas-microsoft-com:mac:vml" xmlns:p="http://schemas.openxmlformats.org/presentationml/2006/main" xmlns:c="http://schemas.openxmlformats.org/drawingml/2006/chart" xmlns:dgm="http://schemas.openxmlformats.org/drawingml/2006/diagram" xmlns:o="urn:schemas-microsoft-com:office:office" xmlns:v="urn:schemas-microsoft-com:vml" xmlns:pvml="urn:schemas-microsoft-com:office:powerpoint" xmlns:com="http://schemas.openxmlformats.org/drawingml/2006/compatibility" xmlns:p14="http://schemas.microsoft.com/office/powerpoint/2010/main" xmlns:p15="http://schemas.microsoft.com/office/powerpoint/2012/main" xmlns:ahyp="http://schemas.microsoft.com/office/drawing/2018/hyperlinkcolor"><p:cSld><p:spTree><p:nvGrpSpPr><p:cNvPr id="101" name="Shape 101"/><p:cNvGrpSpPr/><p:nvPr/></p:nvGrpSpPr><p:grpSpPr><a:xfrm><a:off x="0" y="0"/><a:ext cx="0" cy="0"/><a:chOff x="0" y="0"/><a:chExt cx="0" cy="0"/></a:xfrm></p:grpSpPr><p:sp><p:nvSpPr><p:cNvPr id="102" name="Google Shape;102;p18"/><p:cNvSpPr txBox="1"/><p:nvPr><p:ph idx="4294967295" type="ctrTitle"/></p:nvPr></p:nvSpPr><p:spPr><a:xfrm><a:off x="1073814" y="409334"/><a:ext cx="5315100" cy="533100"/></a:xfrm><a:prstGeom prst="rect"><a:avLst/></a:prstGeom><a:noFill/><a:ln><a:noFill/></a:ln></p:spPr><p:txBody><a:bodyPr anchorCtr="0" anchor="t" bIns="91425" lIns="91425" spcFirstLastPara="1" rIns="91425" wrap="square" tIns="91425"><a:noAutofit/></a:bodyPr><a:lstStyle/><a:p><a:pPr indent="0" lvl="0" marL="0" marR="0" rtl="0" algn="l"><a:lnSpc><a:spcPct val="100000"/></a:lnSpc><a:spcBef><a:spcPts val="0"/></a:spcBef><a:spcAft><a:spcPts val="0"/></a:spcAft><a:buNone/></a:pPr><a:r><a:rPr lang="fr" sz="2500"><a:solidFill><a:srgbClr val="0E3449"/></a:solidFill><a:latin typeface="Inter SemiBold"/><a:ea typeface="Inter SemiBold"/><a:cs typeface="Inter SemiBold"/><a:sym typeface="Inter SemiBold"/></a:rPr><a:t>2.   Les données</a:t></a:r><a:endParaRPr i="0" sz="2500" u="none" cap="none" strike="noStrike"><a:solidFill><a:srgbClr val="0E3449"/></a:solidFill><a:latin typeface="Inter SemiBold"/><a:ea typeface="Inter SemiBold"/><a:cs typeface="Inter SemiBold"/><a:sym typeface="Inter SemiBold"/></a:endParaRPr></a:p></p:txBody></p:sp><p:sp><p:nvSpPr><p:cNvPr id="103" name="Google Shape;103;p18"/><p:cNvSpPr/><p:nvPr/></p:nvSpPr><p:spPr><a:xfrm><a:off x="43775" y="4892100"/><a:ext cx="9144000" cy="251400"/></a:xfrm><a:prstGeom prst="rect"><a:avLst/></a:prstGeom><a:solidFill><a:srgbClr val="C3FFFC"/></a:solidFill><a:ln><a:noFill/></a:ln></p:spPr><p:txBody><a:bodyPr anchorCtr="0" anchor="ctr" bIns="91425" lIns="91425" spcFirstLastPara="1" rIns="91425" wrap="square" tIns="91425"><a:noAutofit/></a:bodyPr><a:lstStyle/><a:p><a:pPr indent="0" lvl="0" marL="0" marR="0" rtl="0" algn="l"><a:lnSpc><a:spcPct val="100000"/></a:lnSpc><a:spcBef><a:spcPts val="0"/></a:spcBef><a:spcAft><a:spcPts val="0"/></a:spcAft><a:buClr><a:srgbClr val="000000"/></a:buClr><a:buSzPts val="1400"/><a:buFont typeface="Arial"/><a:buNone/></a:pPr><a:r><a:t></a:t></a:r><a:endParaRPr b="0" i="0" sz="1400" u="none" cap="none" strike="noStrike"><a:solidFill><a:srgbClr val="000000"/></a:solidFill><a:latin typeface="Arial"/><a:ea typeface="Arial"/><a:cs typeface="Arial"/><a:sym typeface="Arial"/></a:endParaRPr></a:p></p:txBody></p:sp><p:pic><p:nvPicPr><p:cNvPr id="104" name="Google Shape;104;p18"/><p:cNvPicPr preferRelativeResize="0"/><p:nvPr/></p:nvPicPr><p:blipFill rotWithShape="1"><a:blip r:embed="rId3"><a:alphaModFix/></a:blip><a:srcRect b="0" l="0" r="0" t="0"/><a:stretch/></p:blipFill><p:spPr><a:xfrm><a:off x="496925" y="482927"/><a:ext cx="576900" cy="385904"/></a:xfrm><a:prstGeom prst="rect"><a:avLst/></a:prstGeom><a:noFill/><a:ln><a:noFill/></a:ln></p:spPr></p:pic><p:sp><p:nvSpPr><p:cNvPr id="105" name="Google Shape;105;p18"/><p:cNvSpPr txBox="1"/><p:nvPr/></p:nvSpPr><p:spPr><a:xfrm><a:off x="3518399" y="329500"/><a:ext cx="5163600" cy="738900"/></a:xfrm><a:prstGeom prst="rect"><a:avLst/></a:prstGeom><a:noFill/><a:ln><a:noFill/></a:ln></p:spPr><p:txBody><a:bodyPr anchorCtr="0" anchor="t" bIns="91425" lIns="91425" spcFirstLastPara="1" rIns="91425" wrap="square" tIns="91425"><a:spAutoFit/></a:bodyPr><a:lstStyle/><a:p><a:pPr indent="0" lvl="0" marL="0" rtl="0" algn="l"><a:spcBef><a:spcPts val="0"/></a:spcBef><a:spcAft><a:spcPts val="0"/></a:spcAft><a:buNone/></a:pPr><a:r><a:rPr lang="fr" sz="1800"><a:solidFill><a:schemeClr val="dk2"/></a:solidFill></a:rPr><a:t>API publique des avis Steam</a:t></a:r><a:br><a:rPr lang="fr" sz="1800"><a:solidFill><a:schemeClr val="dk2"/></a:solidFill></a:rPr></a:br><a:r><a:rPr lang="fr" sz="1800"><a:solidFill><a:schemeClr val="dk2"/></a:solidFill></a:rPr><a:t>9 410 lignes brutes — 3 jeux, anglais et français</a:t></a:r><a:endParaRPr sz="1800"><a:solidFill><a:schemeClr val="dk2"/></a:solidFill></a:endParaRPr></a:p></p:txBody></p:sp><p:sp><p:nvSpPr><p:cNvPr id="106" name="Google Shape;106;p18"/><p:cNvSpPr/><p:nvPr/></p:nvSpPr><p:spPr><a:xfrm><a:off x="402939" y="1156461"/><a:ext cx="3615000" cy="193800"/></a:xfrm><a:prstGeom prst="rect"><a:avLst/></a:prstGeom><a:noFill/><a:ln><a:noFill/></a:ln></p:spPr><p:txBody><a:bodyPr anchorCtr="0" anchor="t" bIns="0" lIns="0" spcFirstLastPara="1" rIns="0" wrap="square" tIns="0"><a:noAutofit/></a:bodyPr><a:lstStyle/><a:p><a:pPr indent="0" lvl="0" marL="0" marR="0" rtl="0" algn="l"><a:lnSpc><a:spcPct val="125000"/></a:lnSpc><a:spcBef><a:spcPts val="0"/></a:spcBef><a:spcAft><a:spcPts val="0"/></a:spcAft><a:buClr><a:srgbClr val="0C0D0F"/></a:buClr><a:buSzPts val="1217"/><a:buFont typeface="Inter"/><a:buNone/></a:pPr><a:r><a:rPr lang="fr" sz="1217"><a:solidFill><a:srgbClr val="0C0D0F"/></a:solidFill><a:latin typeface="Inter"/><a:ea typeface="Inter"/><a:cs typeface="Inter"/><a:sym typeface="Inter"/></a:rPr><a:t>Traitement en 5 étapes, testé à chaque passage</a:t></a:r><a:endParaRPr b="0" i="0" sz="1217" u="none" cap="none" strike="noStrike"/></a:p></p:txBody></p:sp><p:sp><p:nvSpPr><p:cNvPr id="107" name="Google Shape;107;p18"/><p:cNvSpPr/><p:nvPr/></p:nvSpPr><p:spPr><a:xfrm><a:off x="402961" y="1448759"/><a:ext cx="1498200" cy="711900"/></a:xfrm><a:prstGeom prst="roundRect"><a:avLst><a:gd fmla="val 11687" name="adj"/></a:avLst></a:prstGeom><a:solidFill><a:srgbClr val="FFFFFF"/></a:solidFill><a:ln cap="flat" cmpd="sng" w="8125"><a:solidFill><a:srgbClr val="FF7047"/></a:solidFill><a:prstDash val="solid"/><a:round/><a:headEnd len="sm" w="sm" type="none"/><a:tailEnd len="sm" w="sm" type="none"/ xml:space="preserve"> 1. </a:t></a:r><a:r><a:rPr b="1" lang="fr" sz="1054"><a:solidFill><a:srgbClr val="55575A"/></a:solidFill><a:latin typeface="Manrope"/><a:ea typeface="Manrope"/><a:cs typeface="Manrope"/><a:sym typeface="Manrope"/></a:rPr><a:t>Zone brute inchangée</a:t></a:r><a:endParaRPr b="1" sz="1054"><a:solidFill><a:srgbClr val="55575A"/></a:solidFill><a:latin typeface="Manrope"/><a:ea typeface="Manrope"/><a:cs typeface="Manrope"/><a:sym typeface="Manrope"/></a:endParaRPr></a:p></p:txBody></p:sp><p:sp><p:nvSpPr><p:cNvPr id="108" name="Google Shape;108;p18"/><p:cNvSpPr/><p:nvPr/></p:nvSpPr><p:spPr><a:xfrm><a:off x="2194798" y="1438311"/><a:ext cx="1498200" cy="711900"/></a:xfrm><a:prstGeom prst="roundRect"><a:avLst><a:gd fmla="val 11687" name="adj"/></a:avLst></a:prstGeom><a:solidFill><a:srgbClr val="FFFFFF"/></a:solidFill><a:ln cap="flat" cmpd="sng" w="8125"><a:solidFill><a:srgbClr val="FF7047"/></a:solidFill><a:prstDash val="solid"/><a:round/><a:headEnd len="sm" w="sm" type="none"/><a:tailEnd len="sm" w="sm" type="none"/ xml:space="preserve">2. Dédoublonnage </a:t></a:r><a:br><a:rPr b="1" lang="fr" sz="1000"><a:solidFill><a:srgbClr val="55575A"/></a:solidFill><a:latin typeface="Manrope"/><a:ea typeface="Manrope"/><a:cs typeface="Manrope"/><a:sym typeface="Manrope"/></a:rPr></a:br><a:r><a:rPr b="1" lang="fr" sz="1000"><a:solidFill><a:srgbClr val="55575A"/></a:solidFill><a:latin typeface="Manrope"/><a:ea typeface="Manrope"/><a:cs typeface="Manrope"/><a:sym typeface="Manrope"/></a:rPr><a:t>et nettoyage du BBCode</a:t></a:r><a:endParaRPr b="1" sz="1000"><a:solidFill><a:srgbClr val="55575A"/></a:solidFill><a:latin typeface="Manrope"/><a:ea typeface="Manrope"/><a:cs typeface="Manrope"/><a:sym typeface="Manrope"/></a:endParaRPr></a:p></p:txBody></p:sp><p:sp><p:nvSpPr><p:cNvPr id="109" name="Google Shape;109;p18"/><p:cNvSpPr/><p:nvPr/></p:nvSpPr><p:spPr><a:xfrm><a:off x="3764412" y="1449638"/><a:ext cx="1498200" cy="711900"/></a:xfrm><a:prstGeom prst="roundRect"><a:avLst><a:gd fmla="val 11687" name="adj"/></a:avLst></a:prstGeom><a:solidFill><a:srgbClr val="FFFFFF"/></a:solidFill><a:ln cap="flat" cmpd="sng" w="8125"><a:solidFill><a:srgbClr val="FF7047"/></a:solidFill><a:prstDash val="solid"/><a:round/><a:headEnd len="sm" w="sm" type="none"/><a:tailEnd len="sm" w="sm" type="none"/>3. Pseudonymisation HMAC</a:t></a:r><a:endParaRPr b="1" sz="1200"><a:solidFill><a:srgbClr val="55575A"/></a:solidFill><a:latin typeface="Manrope"/><a:ea typeface="Manrope"/><a:cs typeface="Manrope"/><a:sym typeface="Manrope"/></a:endParaRPr></a:p></p:txBody></p:sp><p:sp><p:nvSpPr><p:cNvPr id="110" name="Google Shape;110;p18"/><p:cNvSpPr/><p:nvPr/></p:nvSpPr><p:spPr><a:xfrm><a:off x="5351099" y="1449650"/><a:ext cx="1498200" cy="711900"/></a:xfrm><a:prstGeom prst="roundRect"><a:avLst><a:gd fmla="val 11687" name="adj"/></a:avLst></a:prstGeom><a:solidFill><a:srgbClr val="FFFFFF"/></a:solidFill><a:ln cap="flat" cmpd="sng" w="8125"><a:solidFill><a:srgbClr val="FF7047"/></a:solidFill><a:prstDash val="solid"/><a:round/><a:headEnd len="sm" w="sm" type="none"/><a:tailEnd len="sm" w="sm" type="none"/>4. Contrôles bloquants</a:t></a:r><a:endParaRPr b="1" sz="1200"><a:solidFill><a:srgbClr val="55575A"/></a:solidFill><a:latin typeface="Manrope"/><a:ea typeface="Manrope"/><a:cs typeface="Manrope"/><a:sym typeface="Manrope"/></a:endParaRPr></a:p></p:txBody></p:sp><p:sp><p:nvSpPr><p:cNvPr id="111" name="Google Shape;111;p18"/><p:cNvSpPr/><p:nvPr/></p:nvSpPr><p:spPr><a:xfrm><a:off x="6937799" y="1460100"/><a:ext cx="1498200" cy="711900"/></a:xfrm><a:prstGeom prst="roundRect"><a:avLst><a:gd fmla="val 11687" name="adj"/></a:avLst></a:prstGeom><a:solidFill><a:srgbClr val="FFFFFF"/></a:solidFill><a:ln cap="flat" cmpd="sng" w="8125"><a:solidFill><a:srgbClr val="FF7047"/></a:solidFill><a:prstDash val="solid"/><a:round/><a:headEnd len="sm" w="sm" type="none"/><a:tailEnd len="sm" w="sm" type="none"/>5. Great Expectations</a:t></a:r><a:endParaRPr b="1" sz="1200"><a:solidFill><a:srgbClr val="55575A"/></a:solidFill><a:latin typeface="Manrope"/><a:ea typeface="Manrope"/><a:cs typeface="Manrope"/><a:sym typeface="Manrope"/></a:endParaRPr></a:p></p:txBody></p:sp><p:sp><p:nvSpPr><p:cNvPr id="112" name="Google Shape;112;p18"/><p:cNvSpPr txBox="1"/><p:nvPr/></p:nvSpPr><p:spPr><a:xfrm><a:off x="402950" y="2701550"/><a:ext cx="8033100" cy="1639200"/></a:xfrm><a:prstGeom prst="rect"><a:avLst/></a:prstGeom><a:noFill/><a:ln><a:noFill/></a:ln></p:spPr><p:txBody><a:bodyPr anchorCtr="0" anchor="t" bIns="91425" lIns="91425" spcFirstLastPara="1" rIns="91425" wrap="square" tIns="91425"><a:spAutoFit/></a:bodyPr><a:lstStyle/><a:p><a:pPr indent="0" lvl="0" marL="0" rtl="0" algn="l"><a:lnSpc><a:spcPct val="115000"/></a:lnSpc><a:spcBef><a:spcPts val="0"/></a:spcBef><a:spcAft><a:spcPts val="0"/></a:spcAft><a:buNone/></a:pPr><a:r><a:rPr b="1" lang="fr"><a:solidFill><a:srgbClr val="015955"/></a:solidFill><a:highlight><a:schemeClr val="lt1"/></a:highlight></a:rPr><a:t>Confidentialité :</a:t></a:r><a:r><a:rPr lang="fr"><a:solidFill><a:srgbClr val="27251E"/></a:solidFill><a:highlight><a:schemeClr val="lt1"/></a:highlight></a:rPr><a:t> </a:t></a:r><a:endParaRPr><a:solidFill><a:srgbClr val="27251E"/></a:solidFill><a:highlight><a:schemeClr val="lt1"/></a:highlight></a:endParaRPr></a:p><a:p><a:pPr indent="-317500" lvl="0" marL="457200" rtl="0" algn="l"><a:lnSpc><a:spcPct val="115000"/></a:lnSpc><a:spcBef><a:spcPts val="0"/></a:spcBef><a:spcAft><a:spcPts val="0"/></a:spcAft><a:buClr><a:schemeClr val="dk2"/></a:buClr><a:buSzPts val="1400"/><a:buChar char="●"/></a:pPr><a:r><a:rPr lang="fr"><a:solidFill><a:schemeClr val="dk2"/></a:solidFill><a:highlight><a:schemeClr val="lt1"/></a:highlight></a:rPr><a:t>steamid</a:t></a:r><a:r><a:rPr lang="fr"><a:solidFill><a:schemeClr val="dk2"/></a:solidFill></a:rPr><a:t xml:space="preserve"> </a:t></a:r><a:r><a:rPr b="1" lang="fr"><a:solidFill><a:schemeClr val="dk2"/></a:solidFill></a:rPr><a:t>→ pseudonymisé (HMAC salé)</a:t></a:r><a:endParaRPr b="1"><a:solidFill><a:schemeClr val="dk2"/></a:solidFill></a:endParaRPr></a:p><a:p><a:pPr indent="-317500" lvl="0" marL="457200" rtl="0" algn="l"><a:lnSpc><a:spcPct val="115000"/></a:lnSpc><a:spcBef><a:spcPts val="0"/></a:spcBef><a:spcAft><a:spcPts val="0"/></a:spcAft><a:buClr><a:schemeClr val="dk2"/></a:buClr><a:buSzPts val="1400"/><a:buChar char="●"/></a:pPr><a:r><a:rPr lang="fr"><a:solidFill><a:schemeClr val="dk2"/></a:solidFill><a:highlight><a:schemeClr val="lt1"/></a:highlight></a:rPr><a:t>personaname, profile_url, avatar : identifiants directs</a:t></a:r><a:r><a:rPr lang="fr"><a:solidFill><a:schemeClr val="dk2"/></a:solidFill></a:rPr><a:t xml:space="preserve"> → </a:t></a:r><a:r><a:rPr b="1" lang="fr"><a:solidFill><a:schemeClr val="dk2"/></a:solidFill></a:rPr><a:t xml:space="preserve">supprimés dès la zone propre </a:t></a:r><a:endParaRPr b="1"><a:solidFill><a:schemeClr val="dk2"/></a:solidFill></a:endParaRPr></a:p><a:p><a:pPr indent="-317500" lvl="0" marL="457200" rtl="0" algn="l"><a:lnSpc><a:spcPct val="115000"/></a:lnSpc><a:spcBef><a:spcPts val="0"/></a:spcBef><a:spcAft><a:spcPts val="0"/></a:spcAft><a:buClr><a:schemeClr val="dk2"/></a:buClr><a:buSzPts val="1400"/><a:buChar char="●"/></a:pPr><a:r><a:rPr lang="fr"><a:solidFill><a:schemeClr val="dk2"/></a:solidFill><a:highlight><a:schemeClr val="lt1"/></a:highlight></a:rPr><a:t>Flux complémentaire</a:t></a:r><a:r><a:rPr lang="fr"><a:solidFill><a:schemeClr val="dk2"/></a:solidFill></a:rPr><a:t xml:space="preserve"> d'avis négatifs </a:t></a:r><a:r><a:rPr b="1" lang="fr"><a:solidFill><a:schemeClr val="dk2"/></a:solidFill></a:rPr><a:t>→ entraînement seulement</a:t></a:r><a:endParaRPr b="1"><a:solidFill><a:schemeClr val="dk2"/></a:solidFill></a:endParaRPr></a:p><a:p><a:pPr indent="-317500" lvl="0" marL="457200" rtl="0" algn="l"><a:lnSpc><a:spcPct val="115000"/></a:lnSpc><a:spcBef><a:spcPts val="0"/></a:spcBef><a:spcAft><a:spcPts val="0"/></a:spcAft><a:buClr><a:schemeClr val="dk2"/></a:buClr><a:buSzPts val="1400"/><a:buChar char="●"/></a:pPr><a:r><a:rPr lang="fr"><a:solidFill><a:schemeClr val="dk2"/></a:solidFill></a:rPr><a:t xml:space="preserve">Idempotence : un second passage n'écrit aucun doublon </a:t></a:r><a:r><a:rPr b="1" lang="fr"><a:solidFill><a:schemeClr val="dk2"/></a:solidFill></a:rPr><a:t>(manifeste)</a:t></a:r><a:endParaRPr><a:solidFill><a:schemeClr val="dk2"/></a:solidFill></a:endParaRPr></a:p><a:p><a:pPr indent="-317500" lvl="0" marL="457200" rtl="0" algn="l"><a:lnSpc><a:spcPct val="115000"/></a:lnSpc><a:spcBef><a:spcPts val="0"/></a:spcBef><a:spcAft><a:spcPts val="0"/></a:spcAft><a:buClr><a:schemeClr val="dk2"/></a:buClr><a:buSzPts val="1400"/><a:buChar char="●"/></a:pPr><a:r><a:rPr lang="fr"><a:solidFill><a:schemeClr val="dk2"/></a:solidFill></a:rPr><a:t xml:space="preserve">Zone silver Iceberg </a:t></a:r><a:r><a:rPr b="1" lang="fr"><a:solidFill><a:schemeClr val="dk2"/></a:solidFill></a:rPr><a:t xml:space="preserve">→ 27 instantanés versionnés, chacun restaurable </a:t></a:r><a:r><a:rPr lang="fr"><a:solidFill><a:schemeClr val="dk2"/></a:solidFill></a:rPr><a:t></a:t></a:r><a:endParaRPr sz="1800"><a:solidFill><a:schemeClr val="dk2"/></a:solidFill></a:endParaRPr></a:p></p:txBody></p:sp></p:spTree></p:cSld><p:clrMapOvr><a:masterClrMapping/></p:clrMapOvr></p:sld>
+<p:sld xmlns:a="http://schemas.openxmlformats.org/drawingml/2006/main" xmlns:r="http://schemas.openxmlformats.org/officeDocument/2006/relationships" xmlns:mc="http://schemas.openxmlformats.org/markup-compatibility/2006" xmlns:mv="urn:schemas-microsoft-com:mac:vml" xmlns:p="http://schemas.openxmlformats.org/presentationml/2006/main" xmlns:c="http://schemas.openxmlformats.org/drawingml/2006/chart" xmlns:dgm="http://schemas.openxmlformats.org/drawingml/2006/diagram" xmlns:o="urn:schemas-microsoft-com:office:office" xmlns:v="urn:schemas-microsoft-com:vml" xmlns:pvml="urn:schemas-microsoft-com:office:powerpoint" xmlns:com="http://schemas.openxmlformats.org/drawingml/2006/compatibility" xmlns:p14="http://schemas.microsoft.com/office/powerpoint/2010/main" xmlns:p15="http://schemas.microsoft.com/office/powerpoint/2012/main" xmlns:ahyp="http://schemas.microsoft.com/office/drawing/2018/hyperlinkcolor"><p:cSld><p:spTree><p:nvGrpSpPr><p:cNvPr id="101" name="Shape 101"/><p:cNvGrpSpPr/><p:nvPr/></p:nvGrpSpPr><p:grpSpPr><a:xfrm><a:off x="0" y="0"/><a:ext cx="0" cy="0"/><a:chOff x="0" y="0"/><a:chExt cx="0" cy="0"/></a:xfrm></p:grpSpPr><p:sp><p:nvSpPr><p:cNvPr id="102" name="Google Shape;102;p18"/><p:cNvSpPr txBox="1"/><p:nvPr><p:ph idx="4294967295" type="ctrTitle"/></p:nvPr></p:nvSpPr><p:spPr><a:xfrm><a:off x="1073814" y="409334"/><a:ext cx="5315100" cy="533100"/></a:xfrm><a:prstGeom prst="rect"><a:avLst/></a:prstGeom><a:noFill/><a:ln><a:noFill/></a:ln></p:spPr><p:txBody><a:bodyPr anchorCtr="0" anchor="t" bIns="91425" lIns="91425" spcFirstLastPara="1" rIns="91425" wrap="square" tIns="91425"><a:noAutofit/></a:bodyPr><a:lstStyle/><a:p><a:pPr indent="0" lvl="0" marL="0" marR="0" rtl="0" algn="l"><a:lnSpc><a:spcPct val="100000"/></a:lnSpc><a:spcBef><a:spcPts val="0"/></a:spcBef><a:spcAft><a:spcPts val="0"/></a:spcAft><a:buNone/></a:pPr><a:r><a:rPr lang="fr" sz="2500"><a:solidFill><a:srgbClr val="0E3449"/></a:solidFill><a:latin typeface="Inter SemiBold"/><a:ea typeface="Inter SemiBold"/><a:cs typeface="Inter SemiBold"/><a:sym typeface="Inter SemiBold"/></a:rPr><a:t>2.   Les données</a:t></a:r><a:endParaRPr i="0" sz="2500" u="none" cap="none" strike="noStrike"><a:solidFill><a:srgbClr val="0E3449"/></a:solidFill><a:latin typeface="Inter SemiBold"/><a:ea typeface="Inter SemiBold"/><a:cs typeface="Inter SemiBold"/><a:sym typeface="Inter SemiBold"/></a:endParaRPr></a:p></p:txBody></p:sp><p:sp><p:nvSpPr><p:cNvPr id="103" name="Google Shape;103;p18"/><p:cNvSpPr/><p:nvPr/></p:nvSpPr><p:spPr><a:xfrm><a:off x="43775" y="4892100"/><a:ext cx="9144000" cy="251400"/></a:xfrm><a:prstGeom prst="rect"><a:avLst/></a:prstGeom><a:solidFill><a:srgbClr val="C3FFFC"/></a:solidFill><a:ln><a:noFill/></a:ln></p:spPr><p:txBody><a:bodyPr anchorCtr="0" anchor="ctr" bIns="91425" lIns="91425" spcFirstLastPara="1" rIns="91425" wrap="square" tIns="91425"><a:noAutofit/></a:bodyPr><a:lstStyle/><a:p><a:pPr indent="0" lvl="0" marL="0" marR="0" rtl="0" algn="l"><a:lnSpc><a:spcPct val="100000"/></a:lnSpc><a:spcBef><a:spcPts val="0"/></a:spcBef><a:spcAft><a:spcPts val="0"/></a:spcAft><a:buClr><a:srgbClr val="000000"/></a:buClr><a:buSzPts val="1400"/><a:buFont typeface="Arial"/><a:buNone/></a:pPr><a:r><a:t></a:t></a:r><a:endParaRPr b="0" i="0" sz="1400" u="none" cap="none" strike="noStrike"><a:solidFill><a:srgbClr val="000000"/></a:solidFill><a:latin typeface="Arial"/><a:ea typeface="Arial"/><a:cs typeface="Arial"/><a:sym typeface="Arial"/></a:endParaRPr></a:p></p:txBody></p:sp><p:pic><p:nvPicPr><p:cNvPr id="104" name="Google Shape;104;p18"/><p:cNvPicPr preferRelativeResize="0"/><p:nvPr/></p:nvPicPr><p:blipFill rotWithShape="1"><a:blip r:embed="rId3"><a:alphaModFix/></a:blip><a:srcRect b="0" l="0" r="0" t="0"/><a:stretch/></p:blipFill><p:spPr><a:xfrm><a:off x="496925" y="482927"/><a:ext cx="576900" cy="385904"/></a:xfrm><a:prstGeom prst="rect"><a:avLst/></a:prstGeom><a:noFill/><a:ln><a:noFill/></a:ln></p:spPr></p:pic><p:sp><p:nvSpPr><p:cNvPr id="105" name="Google Shape;105;p18"/><p:cNvSpPr txBox="1"/><p:nvPr/></p:nvSpPr><p:spPr><a:xfrm><a:off x="3518399" y="329500"/><a:ext cx="5163600" cy="738900"/></a:xfrm><a:prstGeom prst="rect"><a:avLst/></a:prstGeom><a:noFill/><a:ln><a:noFill/></a:ln></p:spPr><p:txBody><a:bodyPr anchorCtr="0" anchor="t" bIns="91425" lIns="91425" spcFirstLastPara="1" rIns="91425" wrap="square" tIns="91425"><a:spAutoFit/></a:bodyPr><a:lstStyle/><a:p><a:pPr indent="0" lvl="0" marL="0" rtl="0" algn="l"><a:spcBef><a:spcPts val="0"/></a:spcBef><a:spcAft><a:spcPts val="0"/></a:spcAft><a:buNone/></a:pPr><a:r><a:rPr lang="fr" sz="1800"><a:solidFill><a:schemeClr val="dk2"/></a:solidFill></a:rPr><a:t>API publique des avis Steam</a:t></a:r><a:br><a:rPr lang="fr" sz="1800"><a:solidFill><a:schemeClr val="dk2"/></a:solidFill></a:rPr></a:br><a:r><a:rPr lang="fr" sz="1800"><a:solidFill><a:schemeClr val="dk2"/></a:solidFill></a:rPr><a:t>Plus de 9 000 lignes brutes — 3 jeux, anglais et français</a:t></a:r><a:endParaRPr sz="1800"><a:solidFill><a:schemeClr val="dk2"/></a:solidFill></a:endParaRPr></a:p></p:txBody></p:sp><p:sp><p:nvSpPr><p:cNvPr id="106" name="Google Shape;106;p18"/><p:cNvSpPr/><p:nvPr/></p:nvSpPr><p:spPr><a:xfrm><a:off x="402939" y="1156461"/><a:ext cx="3615000" cy="193800"/></a:xfrm><a:prstGeom prst="rect"><a:avLst/></a:prstGeom><a:noFill/><a:ln><a:noFill/></a:ln></p:spPr><p:txBody><a:bodyPr anchorCtr="0" anchor="t" bIns="0" lIns="0" spcFirstLastPara="1" rIns="0" wrap="square" tIns="0"><a:noAutofit/></a:bodyPr><a:lstStyle/><a:p><a:pPr indent="0" lvl="0" marL="0" marR="0" rtl="0" algn="l"><a:lnSpc><a:spcPct val="125000"/></a:lnSpc><a:spcBef><a:spcPts val="0"/></a:spcBef><a:spcAft><a:spcPts val="0"/></a:spcAft><a:buClr><a:srgbClr val="0C0D0F"/></a:buClr><a:buSzPts val="1217"/><a:buFont typeface="Inter"/><a:buNone/></a:pPr><a:r><a:rPr lang="fr" sz="1217"><a:solidFill><a:srgbClr val="0C0D0F"/></a:solidFill><a:latin typeface="Inter"/><a:ea typeface="Inter"/><a:cs typeface="Inter"/><a:sym typeface="Inter"/></a:rPr><a:t>Traitement en 5 étapes, testé à chaque passage</a:t></a:r><a:endParaRPr b="0" i="0" sz="1217" u="none" cap="none" strike="noStrike"/></a:p></p:txBody></p:sp><p:sp><p:nvSpPr><p:cNvPr id="107" name="Google Shape;107;p18"/><p:cNvSpPr/><p:nvPr/></p:nvSpPr><p:spPr><a:xfrm><a:off x="402961" y="1448759"/><a:ext cx="1498200" cy="711900"/></a:xfrm><a:prstGeom prst="roundRect"><a:avLst><a:gd fmla="val 11687" name="adj"/></a:avLst></a:prstGeom><a:solidFill><a:srgbClr val="FFFFFF"/></a:solidFill><a:ln cap="flat" cmpd="sng" w="8125"><a:solidFill><a:srgbClr val="FF7047"/></a:solidFill><a:prstDash val="solid"/><a:round/><a:headEnd len="sm" w="sm" type="none"/><a:tailEnd len="sm" w="sm" type="none"/ xml:space="preserve"> 1. </a:t></a:r><a:r><a:rPr b="1" lang="fr" sz="1054"><a:solidFill><a:srgbClr val="55575A"/></a:solidFill><a:latin typeface="Manrope"/><a:ea typeface="Manrope"/><a:cs typeface="Manrope"/><a:sym typeface="Manrope"/></a:rPr><a:t>Zone brute inchangée</a:t></a:r><a:endParaRPr b="1" sz="1054"><a:solidFill><a:srgbClr val="55575A"/></a:solidFill><a:latin typeface="Manrope"/><a:ea typeface="Manrope"/><a:cs typeface="Manrope"/><a:sym typeface="Manrope"/></a:endParaRPr></a:p></p:txBody></p:sp><p:sp><p:nvSpPr><p:cNvPr id="108" name="Google Shape;108;p18"/><p:cNvSpPr/><p:nvPr/></p:nvSpPr><p:spPr><a:xfrm><a:off x="2194798" y="1438311"/><a:ext cx="1498200" cy="711900"/></a:xfrm><a:prstGeom prst="roundRect"><a:avLst><a:gd fmla="val 11687" name="adj"/></a:avLst></a:prstGeom><a:solidFill><a:srgbClr val="FFFFFF"/></a:solidFill><a:ln cap="flat" cmpd="sng" w="8125"><a:solidFill><a:srgbClr val="FF7047"/></a:solidFill><a:prstDash val="solid"/><a:round/><a:headEnd len="sm" w="sm" type="none"/><a:tailEnd len="sm" w="sm" type="none"/ xml:space="preserve">2. Dédoublonnage </a:t></a:r><a:br><a:rPr b="1" lang="fr" sz="1000"><a:solidFill><a:srgbClr val="55575A"/></a:solidFill><a:latin typeface="Manrope"/><a:ea typeface="Manrope"/><a:cs typeface="Manrope"/><a:sym typeface="Manrope"/></a:rPr></a:br><a:r><a:rPr b="1" lang="fr" sz="1000"><a:solidFill><a:srgbClr val="55575A"/></a:solidFill><a:latin typeface="Manrope"/><a:ea typeface="Manrope"/><a:cs typeface="Manrope"/><a:sym typeface="Manrope"/></a:rPr><a:t>et nettoyage du BBCode</a:t></a:r><a:endParaRPr b="1" sz="1000"><a:solidFill><a:srgbClr val="55575A"/></a:solidFill><a:latin typeface="Manrope"/><a:ea typeface="Manrope"/><a:cs typeface="Manrope"/><a:sym typeface="Manrope"/></a:endParaRPr></a:p></p:txBody></p:sp><p:sp><p:nvSpPr><p:cNvPr id="109" name="Google Shape;109;p18"/><p:cNvSpPr/><p:nvPr/></p:nvSpPr><p:spPr><a:xfrm><a:off x="3764412" y="1449638"/><a:ext cx="1498200" cy="711900"/></a:xfrm><a:prstGeom prst="roundRect"><a:avLst><a:gd fmla="val 11687" name="adj"/></a:avLst></a:prstGeom><a:solidFill><a:srgbClr val="FFFFFF"/></a:solidFill><a:ln cap="flat" cmpd="sng" w="8125"><a:solidFill><a:srgbClr val="FF7047"/></a:solidFill><a:prstDash val="solid"/><a:round/><a:headEnd len="sm" w="sm" type="none"/><a:tailEnd len="sm" w="sm" type="none"/>3. Pseudonymisation HMAC</a:t></a:r><a:endParaRPr b="1" sz="1200"><a:solidFill><a:srgbClr val="55575A"/></a:solidFill><a:latin typeface="Manrope"/><a:ea typeface="Manrope"/><a:cs typeface="Manrope"/><a:sym typeface="Manrope"/></a:endParaRPr></a:p></p:txBody></p:sp><p:sp><p:nvSpPr><p:cNvPr id="110" name="Google Shape;110;p18"/><p:cNvSpPr/><p:nvPr/></p:nvSpPr><p:spPr><a:xfrm><a:off x="5351099" y="1449650"/><a:ext cx="1498200" cy="711900"/></a:xfrm><a:prstGeom prst="roundRect"><a:avLst><a:gd fmla="val 11687" name="adj"/></a:avLst></a:prstGeom><a:solidFill><a:srgbClr val="FFFFFF"/></a:solidFill><a:ln cap="flat" cmpd="sng" w="8125"><a:solidFill><a:srgbClr val="FF7047"/></a:solidFill><a:prstDash val="solid"/><a:round/><a:headEnd len="sm" w="sm" type="none"/><a:tailEnd len="sm" w="sm" type="none"/>4. Contrôles bloquants</a:t></a:r><a:endParaRPr b="1" sz="1200"><a:solidFill><a:srgbClr val="55575A"/></a:solidFill><a:latin typeface="Manrope"/><a:ea typeface="Manrope"/><a:cs typeface="Manrope"/><a:sym typeface="Manrope"/></a:endParaRPr></a:p></p:txBody></p:sp><p:sp><p:nvSpPr><p:cNvPr id="111" name="Google Shape;111;p18"/><p:cNvSpPr/><p:nvPr/></p:nvSpPr><p:spPr><a:xfrm><a:off x="6937799" y="1460100"/><a:ext cx="1498200" cy="711900"/></a:xfrm><a:prstGeom prst="roundRect"><a:avLst><a:gd fmla="val 11687" name="adj"/></a:avLst></a:prstGeom><a:solidFill><a:srgbClr val="FFFFFF"/></a:solidFill><a:ln cap="flat" cmpd="sng" w="8125"><a:solidFill><a:srgbClr val="FF7047"/></a:solidFill><a:prstDash val="solid"/><a:round/><a:headEnd len="sm" w="sm" type="none"/><a:tailEnd len="sm" w="sm" type="none"/>5. Great Expectations</a:t></a:r><a:endParaRPr b="1" sz="1200"><a:solidFill><a:srgbClr val="55575A"/></a:solidFill><a:latin typeface="Manrope"/><a:ea typeface="Manrope"/><a:cs typeface="Manrope"/><a:sym typeface="Manrope"/></a:endParaRPr></a:p></p:txBody></p:sp><p:sp><p:nvSpPr><p:cNvPr id="112" name="Google Shape;112;p18"/><p:cNvSpPr txBox="1"/><p:nvPr/></p:nvSpPr><p:spPr><a:xfrm><a:off x="402950" y="2701550"/><a:ext cx="8033100" cy="1639200"/></a:xfrm><a:prstGeom prst="rect"><a:avLst/></a:prstGeom><a:noFill/><a:ln><a:noFill/></a:ln></p:spPr><p:txBody><a:bodyPr anchorCtr="0" anchor="t" bIns="91425" lIns="91425" spcFirstLastPara="1" rIns="91425" wrap="square" tIns="91425"><a:spAutoFit/></a:bodyPr><a:lstStyle/><a:p><a:pPr indent="0" lvl="0" marL="0" rtl="0" algn="l"><a:lnSpc><a:spcPct val="115000"/></a:lnSpc><a:spcBef><a:spcPts val="0"/></a:spcBef><a:spcAft><a:spcPts val="0"/></a:spcAft><a:buNone/></a:pPr><a:r><a:rPr b="1" lang="fr"><a:solidFill><a:srgbClr val="015955"/></a:solidFill><a:highlight><a:schemeClr val="lt1"/></a:highlight></a:rPr><a:t>Confidentialité :</a:t></a:r><a:r><a:rPr lang="fr"><a:solidFill><a:srgbClr val="27251E"/></a:solidFill><a:highlight><a:schemeClr val="lt1"/></a:highlight></a:rPr><a:t> </a:t></a:r><a:endParaRPr><a:solidFill><a:srgbClr val="27251E"/></a:solidFill><a:highlight><a:schemeClr val="lt1"/></a:highlight></a:endParaRPr></a:p><a:p><a:pPr indent="-317500" lvl="0" marL="457200" rtl="0" algn="l"><a:lnSpc><a:spcPct val="115000"/></a:lnSpc><a:spcBef><a:spcPts val="0"/></a:spcBef><a:spcAft><a:spcPts val="0"/></a:spcAft><a:buClr><a:schemeClr val="dk2"/></a:buClr><a:buSzPts val="1400"/><a:buChar char="●"/></a:pPr><a:r><a:rPr lang="fr"><a:solidFill><a:schemeClr val="dk2"/></a:solidFill><a:highlight><a:schemeClr val="lt1"/></a:highlight></a:rPr><a:t>steamid</a:t></a:r><a:r><a:rPr lang="fr"><a:solidFill><a:schemeClr val="dk2"/></a:solidFill></a:rPr><a:t xml:space="preserve"> </a:t></a:r><a:r><a:rPr b="1" lang="fr"><a:solidFill><a:schemeClr val="dk2"/></a:solidFill></a:rPr><a:t>→ pseudonymisé (HMAC salé)</a:t></a:r><a:endParaRPr b="1"><a:solidFill><a:schemeClr val="dk2"/></a:solidFill></a:endParaRPr></a:p><a:p><a:pPr indent="-317500" lvl="0" marL="457200" rtl="0" algn="l"><a:lnSpc><a:spcPct val="115000"/></a:lnSpc><a:spcBef><a:spcPts val="0"/></a:spcBef><a:spcAft><a:spcPts val="0"/></a:spcAft><a:buClr><a:schemeClr val="dk2"/></a:buClr><a:buSzPts val="1400"/><a:buChar char="●"/></a:pPr><a:r><a:rPr lang="fr"><a:solidFill><a:schemeClr val="dk2"/></a:solidFill><a:highlight><a:schemeClr val="lt1"/></a:highlight></a:rPr><a:t>personaname, profile_url, avatar : identifiants directs</a:t></a:r><a:r><a:rPr lang="fr"><a:solidFill><a:schemeClr val="dk2"/></a:solidFill></a:rPr><a:t xml:space="preserve"> → </a:t></a:r><a:r><a:rPr b="1" lang="fr"><a:solidFill><a:schemeClr val="dk2"/></a:solidFill></a:rPr><a:t xml:space="preserve">supprimés dès la zone propre </a:t></a:r><a:endParaRPr b="1"><a:solidFill><a:schemeClr val="dk2"/></a:solidFill></a:endParaRPr></a:p><a:p><a:pPr indent="-317500" lvl="0" marL="457200" rtl="0" algn="l"><a:lnSpc><a:spcPct val="115000"/></a:lnSpc><a:spcBef><a:spcPts val="0"/></a:spcBef><a:spcAft><a:spcPts val="0"/></a:spcAft><a:buClr><a:schemeClr val="dk2"/></a:buClr><a:buSzPts val="1400"/><a:buChar char="●"/></a:pPr><a:r><a:rPr lang="fr"><a:solidFill><a:schemeClr val="dk2"/></a:solidFill><a:highlight><a:schemeClr val="lt1"/></a:highlight></a:rPr><a:t>Flux complémentaire</a:t></a:r><a:r><a:rPr lang="fr"><a:solidFill><a:schemeClr val="dk2"/></a:solidFill></a:rPr><a:t xml:space="preserve"> d'avis négatifs </a:t></a:r><a:r><a:rPr b="1" lang="fr"><a:solidFill><a:schemeClr val="dk2"/></a:solidFill></a:rPr><a:t>→ entraînement seulement</a:t></a:r><a:endParaRPr b="1"><a:solidFill><a:schemeClr val="dk2"/></a:solidFill></a:endParaRPr></a:p><a:p><a:pPr indent="-317500" lvl="0" marL="457200" rtl="0" algn="l"><a:lnSpc><a:spcPct val="115000"/></a:lnSpc><a:spcBef><a:spcPts val="0"/></a:spcBef><a:spcAft><a:spcPts val="0"/></a:spcAft><a:buClr><a:schemeClr val="dk2"/></a:buClr><a:buSzPts val="1400"/><a:buChar char="●"/></a:pPr><a:r><a:rPr lang="fr"><a:solidFill><a:schemeClr val="dk2"/></a:solidFill></a:rPr><a:t xml:space="preserve">Idempotence : un second passage n'écrit aucun doublon </a:t></a:r><a:r><a:rPr b="1" lang="fr"><a:solidFill><a:schemeClr val="dk2"/></a:solidFill></a:rPr><a:t>(manifeste)</a:t></a:r><a:endParaRPr><a:solidFill><a:schemeClr val="dk2"/></a:solidFill></a:endParaRPr></a:p><a:p><a:pPr indent="-317500" lvl="0" marL="457200" rtl="0" algn="l"><a:lnSpc><a:spcPct val="115000"/></a:lnSpc><a:spcBef><a:spcPts val="0"/></a:spcBef><a:spcAft><a:spcPts val="0"/></a:spcAft><a:buClr><a:schemeClr val="dk2"/></a:buClr><a:buSzPts val="1400"/><a:buChar char="●"/></a:pPr><a:r><a:rPr lang="fr"><a:solidFill><a:schemeClr val="dk2"/></a:solidFill></a:rPr><a:t xml:space="preserve">Zone silver Iceberg </a:t></a:r><a:r><a:rPr b="1" lang="fr"><a:solidFill><a:schemeClr val="dk2"/></a:solidFill></a:rPr><a:t xml:space="preserve">→ un instantané par écriture, chacun restaurable </a:t></a:r><a:r><a:rPr lang="fr"><a:solidFill><a:schemeClr val="dk2"/></a:solidFill></a:rPr><a:t></a:t></a:r><a:endParaRPr sz="1800"><a:solidFill><a:schemeClr val="dk2"/></a:solidFill></a:endParaRPr></a:p></p:txBody></p:sp></p:spTree></p:cSld><p:clrMapOvr><a:masterClrMapping/></p:clrMapOvr></p:sld>
 </file>
 
 <file path=ppt/theme/theme1.xml><?xml version="1.0" encoding="utf-8"?>

--- a/docs/presentation/ReviewPulse_DemoDay.pptx
+++ b/docs/presentation/ReviewPulse_DemoDay.pptx
@@ -8949,7 +8949,7 @@
                   <a:schemeClr val="dk2"/>
                 </a:solidFill>
               </a:rPr>
-              <a:t>144 verts</a:t>
+              <a:t>148 verts</a:t>
             </a:r>
             <a:r>
               <a:rPr lang="fr" sz="2400">

--- a/docs/presentation/ReviewPulse_DemoDay.pptx
+++ b/docs/presentation/ReviewPulse_DemoDay.pptx
@@ -9746,7 +9746,7 @@
                   <a:srgbClr val="FFFFFF"/>
                 </a:highlight>
               </a:rPr>
-              <a:t>Socle de briques réemployables — 30 décisions écrites, ADR 0001 à 0030. Chaque bloc garde son projet imposé : ce sont les briques qui circulent, pas le projet</a:t>
+              <a:t>Socle de briques réemployables — 31 décisions écrites, ADR 0001 à 0031. Chaque bloc garde son projet imposé : ce sont les briques qui circulent, pas le projet</a:t>
             </a:r>
             <a:endParaRPr sz="1300">
               <a:solidFill>

--- a/docs/presentation/ReviewPulse_DemoDay.pptx
+++ b/docs/presentation/ReviewPulse_DemoDay.pptx
@@ -8949,7 +8949,7 @@
                   <a:schemeClr val="dk2"/>
                 </a:solidFill>
               </a:rPr>
-              <a:t>148 verts</a:t>
+              <a:t>149 verts</a:t>
             </a:r>
             <a:r>
               <a:rPr lang="fr" sz="2400">
@@ -8957,7 +8957,7 @@
                   <a:schemeClr val="dk2"/>
                 </a:solidFill>
               </a:rPr>
-              <a:t xml:space="preserve"> ; 27 mutations sur 27 détectées, en un seul passage en intégration continue</a:t>
+              <a:t xml:space="preserve"> ; 28 mutations sur 28 détectées, en un seul passage en intégration continue</a:t>
             </a:r>
             <a:endParaRPr sz="2400">
               <a:solidFill>
